--- a/FirstSemester/web/DLSS_Presentation_2026.pptx
+++ b/FirstSemester/web/DLSS_Presentation_2026.pptx
@@ -3114,7 +3114,7 @@
             <a:avLst/>
           </a:prstGeom>
           <a:solidFill>
-            <a:srgbClr val="0B0F17"/>
+            <a:srgbClr val="0A0D14"/>
           </a:solidFill>
           <a:ln>
             <a:noFill/>
@@ -3158,8 +3158,8 @@
         </p:blipFill>
         <p:spPr>
           <a:xfrm>
-            <a:off x="6583680" y="1097280"/>
-            <a:ext cx="4846320" cy="4663440"/>
+            <a:off x="6217920" y="731520"/>
+            <a:ext cx="5303520" cy="5394960"/>
           </a:xfrm>
           <a:prstGeom prst="rect">
             <a:avLst/>
@@ -3174,14 +3174,14 @@
         </p:nvSpPr>
         <p:spPr>
           <a:xfrm>
-            <a:off x="731520" y="1371600"/>
-            <a:ext cx="5303520" cy="411480"/>
+            <a:off x="731520" y="731520"/>
+            <a:ext cx="5120640" cy="5394960"/>
           </a:xfrm>
           <a:prstGeom prst="roundRect">
             <a:avLst/>
           </a:prstGeom>
           <a:solidFill>
-            <a:srgbClr val="12280A"/>
+            <a:srgbClr val="121826"/>
           </a:solidFill>
           <a:ln>
             <a:solidFill>
@@ -3204,155 +3204,81 @@
           </a:fontRef>
         </p:style>
         <p:txBody>
-          <a:bodyPr rtlCol="0" anchor="ctr"/>
-          <a:lstStyle/>
-          <a:p>
+          <a:bodyPr rtlCol="0" anchor="ctr" wrap="square"/>
+          <a:lstStyle/>
+          <a:p>
+            <a:pPr algn="ctr">
+              <a:defRPr sz="1000" b="1">
+                <a:solidFill>
+                  <a:srgbClr val="76B900"/>
+                </a:solidFill>
+              </a:defRPr>
+            </a:pPr>
+            <a:r>
+              <a:t>ТЕХНОЛОГІЇ ВЕБРОЗРОБКИ ТА ДИЗАЙНУ · КАФЕДРА САПР</a:t>
+            </a:r>
+          </a:p>
+          <a:p>
+            <a:br/>
             <a:pPr>
-              <a:defRPr sz="1000" b="1">
+              <a:defRPr sz="3600" b="1">
                 <a:solidFill>
                   <a:srgbClr val="76B900"/>
                 </a:solidFill>
               </a:defRPr>
             </a:pPr>
             <a:r>
-              <a:t>ТЕХНОЛОГІЇ ВЕБРОЗРОБКИ ТА ДИЗАЙНУ · ШІ-НОВИНКИ 2026</a:t>
-            </a:r>
-          </a:p>
-        </p:txBody>
-      </p:sp>
-      <p:sp>
-        <p:nvSpPr>
-          <p:cNvPr id="5" name="TextBox 4"/>
-          <p:cNvSpPr txBox="1"/>
-          <p:nvPr/>
-        </p:nvSpPr>
-        <p:spPr>
-          <a:xfrm>
-            <a:off x="731520" y="1920240"/>
-            <a:ext cx="5669280" cy="2011680"/>
-          </a:xfrm>
-          <a:prstGeom prst="rect">
-            <a:avLst/>
-          </a:prstGeom>
-          <a:noFill/>
-        </p:spPr>
-        <p:txBody>
-          <a:bodyPr wrap="square">
-            <a:spAutoFit/>
-          </a:bodyPr>
-          <a:lstStyle/>
+              <a:t>NVIDIA DLSS 5:</a:t>
+            </a:r>
+          </a:p>
           <a:p>
             <a:pPr>
-              <a:defRPr sz="3800" b="1">
-                <a:solidFill>
-                  <a:srgbClr val="76B900"/>
-                </a:solidFill>
-              </a:defRPr>
-            </a:pPr>
-            <a:r>
-              <a:t>NVIDIA DLSS 5:</a:t>
+              <a:defRPr sz="2400" b="1">
+                <a:solidFill>
+                  <a:srgbClr val="FFFFFF"/>
+                </a:solidFill>
+              </a:defRPr>
+            </a:pPr>
+            <a:r>
+              <a:t>3D-Guided Neural Rendering</a:t>
             </a:r>
           </a:p>
           <a:p>
             <a:pPr>
-              <a:defRPr sz="2800" b="1">
+              <a:defRPr sz="1300">
+                <a:solidFill>
+                  <a:srgbClr val="9CA3AF"/>
+                </a:solidFill>
+              </a:defRPr>
+            </a:pPr>
+            <a:r>
+              <a:t>Прорив нейронного світла та жовтневе оновлення продуктивності 2026 року</a:t>
+            </a:r>
+          </a:p>
+          <a:p>
+            <a:br/>
+            <a:br/>
+            <a:pPr>
+              <a:defRPr sz="1400" b="1">
                 <a:solidFill>
                   <a:srgbClr val="FFFFFF"/>
                 </a:solidFill>
               </a:defRPr>
             </a:pPr>
             <a:r>
-              <a:t>3D-Guided Neural Rendering</a:t>
-            </a:r>
-          </a:p>
-          <a:p>
-            <a:pPr>
-              <a:defRPr sz="1400">
-                <a:solidFill>
-                  <a:srgbClr val="9CA3AF"/>
-                </a:solidFill>
-              </a:defRPr>
-            </a:pPr>
-            <a:r>
-              <a:t>Прорив нейронного світла та жовтневе оновлення 2026 року</a:t>
-            </a:r>
-          </a:p>
-        </p:txBody>
-      </p:sp>
-      <p:sp>
-        <p:nvSpPr>
-          <p:cNvPr id="6" name="Rounded Rectangle 5"/>
-          <p:cNvSpPr/>
-          <p:nvPr/>
-        </p:nvSpPr>
-        <p:spPr>
-          <a:xfrm>
-            <a:off x="731520" y="4297680"/>
-            <a:ext cx="5303520" cy="1463040"/>
-          </a:xfrm>
-          <a:prstGeom prst="roundRect">
-            <a:avLst/>
-          </a:prstGeom>
-          <a:solidFill>
-            <a:srgbClr val="161E31"/>
-          </a:solidFill>
-          <a:ln>
-            <a:solidFill>
-              <a:srgbClr val="283750"/>
-            </a:solidFill>
-          </a:ln>
-        </p:spPr>
-        <p:style>
-          <a:lnRef idx="1">
-            <a:schemeClr val="accent1"/>
-          </a:lnRef>
-          <a:fillRef idx="3">
-            <a:schemeClr val="accent1"/>
-          </a:fillRef>
-          <a:effectRef idx="2">
-            <a:schemeClr val="accent1"/>
-          </a:effectRef>
-          <a:fontRef idx="minor">
-            <a:schemeClr val="lt1"/>
-          </a:fontRef>
-        </p:style>
-        <p:txBody>
-          <a:bodyPr rtlCol="0" anchor="ctr" wrap="square"/>
-          <a:lstStyle/>
-          <a:p>
-            <a:pPr algn="ctr">
-              <a:defRPr b="1" sz="1500">
-                <a:solidFill>
-                  <a:srgbClr val="FFFFFF"/>
-                </a:solidFill>
-              </a:defRPr>
-            </a:pPr>
-            <a:r>
-              <a:t>Доповідач: Лемішка Андрій</a:t>
-            </a:r>
-          </a:p>
-          <a:p>
-            <a:pPr>
-              <a:defRPr sz="1200">
-                <a:solidFill>
-                  <a:srgbClr val="76B900"/>
-                </a:solidFill>
-              </a:defRPr>
-            </a:pPr>
-            <a:r>
-              <a:t>Група: ПП-24 · Кафедра САПР</a:t>
+              <a:t>Доповідач: Лемішка Андрій (ПП-24)</a:t>
             </a:r>
           </a:p>
           <a:p>
             <a:pPr>
               <a:defRPr sz="1100">
                 <a:solidFill>
-                  <a:srgbClr val="9CA3AF"/>
-                </a:solidFill>
-              </a:defRPr>
-            </a:pPr>
-            <a:r>
-              <a:t>Національний університет «Львівська політехніка»</a:t>
+                  <a:srgbClr val="22D3EE"/>
+                </a:solidFill>
+              </a:defRPr>
+            </a:pPr>
+            <a:r>
+              <a:t>Національний університет «Львівська політехніка» · 2026</a:t>
             </a:r>
           </a:p>
         </p:txBody>
@@ -3390,7 +3316,7 @@
             <a:avLst/>
           </a:prstGeom>
           <a:solidFill>
-            <a:srgbClr val="0B0F17"/>
+            <a:srgbClr val="0A0D14"/>
           </a:solidFill>
           <a:ln>
             <a:noFill/>
@@ -3420,92 +3346,20 @@
       </p:sp>
       <p:sp>
         <p:nvSpPr>
-          <p:cNvPr id="3" name="TextBox 2"/>
-          <p:cNvSpPr txBox="1"/>
-          <p:nvPr/>
-        </p:nvSpPr>
-        <p:spPr>
-          <a:xfrm>
-            <a:off x="731520" y="365760"/>
-            <a:ext cx="7315200" cy="365760"/>
-          </a:xfrm>
-          <a:prstGeom prst="rect">
-            <a:avLst/>
-          </a:prstGeom>
-          <a:noFill/>
-        </p:spPr>
-        <p:txBody>
-          <a:bodyPr wrap="square">
-            <a:spAutoFit/>
-          </a:bodyPr>
-          <a:lstStyle/>
-          <a:p>
-            <a:pPr>
-              <a:defRPr sz="1000" b="1">
-                <a:solidFill>
-                  <a:srgbClr val="76B900"/>
-                </a:solidFill>
-                <a:latin typeface="Arial"/>
-              </a:defRPr>
-            </a:pPr>
-            <a:r>
-              <a:t>●  РЕГЛАМЕНТ: ПУНКТ 6   |   СЛАЙД 10 / 12</a:t>
-            </a:r>
-          </a:p>
-        </p:txBody>
-      </p:sp>
-      <p:sp>
-        <p:nvSpPr>
-          <p:cNvPr id="4" name="TextBox 3"/>
-          <p:cNvSpPr txBox="1"/>
-          <p:nvPr/>
-        </p:nvSpPr>
-        <p:spPr>
-          <a:xfrm>
-            <a:off x="731520" y="640080"/>
-            <a:ext cx="10515600" cy="731520"/>
-          </a:xfrm>
-          <a:prstGeom prst="rect">
-            <a:avLst/>
-          </a:prstGeom>
-          <a:noFill/>
-        </p:spPr>
-        <p:txBody>
-          <a:bodyPr wrap="square">
-            <a:spAutoFit/>
-          </a:bodyPr>
-          <a:lstStyle/>
-          <a:p>
-            <a:pPr>
-              <a:defRPr sz="2400" b="1">
-                <a:solidFill>
-                  <a:srgbClr val="FFFFFF"/>
-                </a:solidFill>
-                <a:latin typeface="Arial"/>
-              </a:defRPr>
-            </a:pPr>
-            <a:r>
-              <a:t>6. Перспективи розвитку: майбутнє комп'ютерної графіки</a:t>
-            </a:r>
-          </a:p>
-        </p:txBody>
-      </p:sp>
-      <p:sp>
-        <p:nvSpPr>
-          <p:cNvPr id="5" name="Rounded Rectangle 4"/>
+          <p:cNvPr id="3" name="Rounded Rectangle 2"/>
           <p:cNvSpPr/>
           <p:nvPr/>
         </p:nvSpPr>
         <p:spPr>
           <a:xfrm>
-            <a:off x="731520" y="1645920"/>
-            <a:ext cx="10698480" cy="1280160"/>
+            <a:off x="731520" y="365760"/>
+            <a:ext cx="4114800" cy="329184"/>
           </a:xfrm>
           <a:prstGeom prst="roundRect">
             <a:avLst/>
           </a:prstGeom>
           <a:solidFill>
-            <a:srgbClr val="161E31"/>
+            <a:srgbClr val="14240C"/>
           </a:solidFill>
           <a:ln>
             <a:solidFill>
@@ -3528,54 +3382,79 @@
           </a:fontRef>
         </p:style>
         <p:txBody>
-          <a:bodyPr rtlCol="0" anchor="ctr" wrap="square"/>
+          <a:bodyPr rtlCol="0" anchor="ctr"/>
           <a:lstStyle/>
           <a:p>
             <a:pPr algn="ctr">
-              <a:defRPr b="1" sz="1400">
+              <a:defRPr sz="950" b="1">
                 <a:solidFill>
                   <a:srgbClr val="76B900"/>
                 </a:solidFill>
-              </a:defRPr>
-            </a:pPr>
-            <a:r>
-              <a:t>1. Neural World Models</a:t>
-            </a:r>
-          </a:p>
+                <a:latin typeface="Arial"/>
+              </a:defRPr>
+            </a:pPr>
+            <a:r>
+              <a:t>●  РЕГЛАМЕНТ: ПУНКТ 5   |   СЛАЙД 10 / 12</a:t>
+            </a:r>
+          </a:p>
+        </p:txBody>
+      </p:sp>
+      <p:sp>
+        <p:nvSpPr>
+          <p:cNvPr id="4" name="TextBox 3"/>
+          <p:cNvSpPr txBox="1"/>
+          <p:nvPr/>
+        </p:nvSpPr>
+        <p:spPr>
+          <a:xfrm>
+            <a:off x="731520" y="685800"/>
+            <a:ext cx="10698480" cy="685800"/>
+          </a:xfrm>
+          <a:prstGeom prst="rect">
+            <a:avLst/>
+          </a:prstGeom>
+          <a:noFill/>
+        </p:spPr>
+        <p:txBody>
+          <a:bodyPr wrap="square">
+            <a:spAutoFit/>
+          </a:bodyPr>
+          <a:lstStyle/>
           <a:p>
             <a:pPr>
-              <a:defRPr sz="1200">
-                <a:solidFill>
-                  <a:srgbClr val="9CA3AF"/>
-                </a:solidFill>
-              </a:defRPr>
-            </a:pPr>
-            <a:r>
-              <a:t>Повний відхід від класичної растеризації. ШІ генеруватиме цілі віртуальні світи безпосередньо з текстових промптів або фізичних моделей.</a:t>
-            </a:r>
-          </a:p>
-        </p:txBody>
-      </p:sp>
-      <p:sp>
-        <p:nvSpPr>
-          <p:cNvPr id="6" name="Rounded Rectangle 5"/>
+              <a:defRPr sz="2200" b="1">
+                <a:solidFill>
+                  <a:srgbClr val="FFFFFF"/>
+                </a:solidFill>
+                <a:latin typeface="Arial"/>
+              </a:defRPr>
+            </a:pPr>
+            <a:r>
+              <a:t>5. Ефект від використання: тести у 4K Ultra RT (NBA 2K27, RTX 5090)</a:t>
+            </a:r>
+          </a:p>
+        </p:txBody>
+      </p:sp>
+      <p:sp>
+        <p:nvSpPr>
+          <p:cNvPr id="5" name="Rounded Rectangle 4"/>
           <p:cNvSpPr/>
           <p:nvPr/>
         </p:nvSpPr>
         <p:spPr>
           <a:xfrm>
-            <a:off x="731520" y="3154680"/>
-            <a:ext cx="10698480" cy="1280160"/>
+            <a:off x="731520" y="1645920"/>
+            <a:ext cx="5486400" cy="4480560"/>
           </a:xfrm>
           <a:prstGeom prst="roundRect">
             <a:avLst/>
           </a:prstGeom>
           <a:solidFill>
-            <a:srgbClr val="161E31"/>
+            <a:srgbClr val="121826"/>
           </a:solidFill>
           <a:ln>
             <a:solidFill>
-              <a:srgbClr val="283750"/>
+              <a:srgbClr val="76B900"/>
             </a:solidFill>
           </a:ln>
         </p:spPr>
@@ -3598,96 +3477,117 @@
           <a:lstStyle/>
           <a:p>
             <a:pPr algn="ctr">
-              <a:defRPr b="1" sz="1400">
-                <a:solidFill>
-                  <a:srgbClr val="FFFFFF"/>
-                </a:solidFill>
-              </a:defRPr>
-            </a:pPr>
-            <a:r>
-              <a:t>2. Єдина генеративна модель</a:t>
-            </a:r>
-          </a:p>
-          <a:p>
+              <a:defRPr sz="1200" b="1">
+                <a:solidFill>
+                  <a:srgbClr val="76B900"/>
+                </a:solidFill>
+              </a:defRPr>
+            </a:pPr>
+            <a:r>
+              <a:t>РЕЗУЛЬТАТИ ТЕСТУВАННЯ У 4K ULTRA RT</a:t>
+            </a:r>
+          </a:p>
+          <a:p>
+            <a:br/>
             <a:pPr>
-              <a:defRPr sz="1200">
+              <a:defRPr sz="1500" b="1">
                 <a:solidFill>
                   <a:srgbClr val="9CA3AF"/>
                 </a:solidFill>
               </a:defRPr>
             </a:pPr>
             <a:r>
-              <a:t>Об'єднання апскейлу, генерації кадрів, світла і звуку в одну уніфіковану мультимодальну мережу реального часу.</a:t>
-            </a:r>
-          </a:p>
-        </p:txBody>
-      </p:sp>
-      <p:sp>
-        <p:nvSpPr>
-          <p:cNvPr id="7" name="Rounded Rectangle 6"/>
-          <p:cNvSpPr/>
+              <a:t>Без DLSS 5 (Базовий RT): 128 FPS</a:t>
+            </a:r>
+          </a:p>
+          <a:p>
+            <a:pPr>
+              <a:defRPr sz="1050">
+                <a:solidFill>
+                  <a:srgbClr val="D1D5DB"/>
+                </a:solidFill>
+              </a:defRPr>
+            </a:pPr>
+            <a:r>
+              <a:t>Традиційне трасування: висока частота, але пластикова шкіра.</a:t>
+            </a:r>
+          </a:p>
+          <a:p>
+            <a:br/>
+            <a:pPr>
+              <a:defRPr sz="1500" b="1">
+                <a:solidFill>
+                  <a:srgbClr val="FBBF24"/>
+                </a:solidFill>
+              </a:defRPr>
+            </a:pPr>
+            <a:r>
+              <a:t>DLSS 5 (До оптимізації): 63 FPS</a:t>
+            </a:r>
+          </a:p>
+          <a:p>
+            <a:pPr>
+              <a:defRPr sz="1050">
+                <a:solidFill>
+                  <a:srgbClr val="D1D5DB"/>
+                </a:solidFill>
+              </a:defRPr>
+            </a:pPr>
+            <a:r>
+              <a:t>Початкова модель: падіння на 51% через складність розрахунку.</a:t>
+            </a:r>
+          </a:p>
+          <a:p>
+            <a:br/>
+            <a:pPr>
+              <a:defRPr sz="1500" b="1">
+                <a:solidFill>
+                  <a:srgbClr val="76B900"/>
+                </a:solidFill>
+              </a:defRPr>
+            </a:pPr>
+            <a:r>
+              <a:t>DLSS 5 (Після 16 жовтня): 105+ FPS</a:t>
+            </a:r>
+          </a:p>
+          <a:p>
+            <a:pPr>
+              <a:defRPr sz="1050">
+                <a:solidFill>
+                  <a:srgbClr val="D1D5DB"/>
+                </a:solidFill>
+              </a:defRPr>
+            </a:pPr>
+            <a:r>
+              <a:t>Жовтневий прорив: повний фотореалізм шкіри з комфортним FPS!</a:t>
+            </a:r>
+          </a:p>
+        </p:txBody>
+      </p:sp>
+      <p:pic>
+        <p:nvPicPr>
+          <p:cNvPr id="6" name="Picture 5" descr="dlss5_beauty_artifact.jpg"/>
+          <p:cNvPicPr>
+            <a:picLocks noChangeAspect="1"/>
+          </p:cNvPicPr>
           <p:nvPr/>
-        </p:nvSpPr>
-        <p:spPr>
-          <a:xfrm>
-            <a:off x="731520" y="4663440"/>
-            <a:ext cx="10698480" cy="1280160"/>
-          </a:xfrm>
-          <a:prstGeom prst="roundRect">
+        </p:nvPicPr>
+        <p:blipFill>
+          <a:blip r:embed="rId2"/>
+          <a:stretch>
+            <a:fillRect/>
+          </a:stretch>
+        </p:blipFill>
+        <p:spPr>
+          <a:xfrm>
+            <a:off x="6400800" y="1645920"/>
+            <a:ext cx="5029200" cy="4480560"/>
+          </a:xfrm>
+          <a:prstGeom prst="rect">
             <a:avLst/>
           </a:prstGeom>
-          <a:solidFill>
-            <a:srgbClr val="161E31"/>
-          </a:solidFill>
-          <a:ln>
-            <a:solidFill>
-              <a:srgbClr val="283750"/>
-            </a:solidFill>
-          </a:ln>
-        </p:spPr>
-        <p:style>
-          <a:lnRef idx="1">
-            <a:schemeClr val="accent1"/>
-          </a:lnRef>
-          <a:fillRef idx="3">
-            <a:schemeClr val="accent1"/>
-          </a:fillRef>
-          <a:effectRef idx="2">
-            <a:schemeClr val="accent1"/>
-          </a:effectRef>
-          <a:fontRef idx="minor">
-            <a:schemeClr val="lt1"/>
-          </a:fontRef>
-        </p:style>
-        <p:txBody>
-          <a:bodyPr rtlCol="0" anchor="ctr" wrap="square"/>
-          <a:lstStyle/>
-          <a:p>
-            <a:pPr algn="ctr">
-              <a:defRPr b="1" sz="1400">
-                <a:solidFill>
-                  <a:srgbClr val="FFFFFF"/>
-                </a:solidFill>
-              </a:defRPr>
-            </a:pPr>
-            <a:r>
-              <a:t>3. Енергоефективність на NPU</a:t>
-            </a:r>
-          </a:p>
-          <a:p>
-            <a:pPr>
-              <a:defRPr sz="1200">
-                <a:solidFill>
-                  <a:srgbClr val="9CA3AF"/>
-                </a:solidFill>
-              </a:defRPr>
-            </a:pPr>
-            <a:r>
-              <a:t>Портування полегшених моделей DLSS на мобільні чіпи та портативні консолі наступного покоління (Switch 2, смартфони).</a:t>
-            </a:r>
-          </a:p>
-        </p:txBody>
-      </p:sp>
+        </p:spPr>
+      </p:pic>
     </p:spTree>
   </p:cSld>
   <p:clrMapOvr>
@@ -3721,7 +3621,7 @@
             <a:avLst/>
           </a:prstGeom>
           <a:solidFill>
-            <a:srgbClr val="0B0F17"/>
+            <a:srgbClr val="0A0D14"/>
           </a:solidFill>
           <a:ln>
             <a:noFill/>
@@ -3751,96 +3651,24 @@
       </p:sp>
       <p:sp>
         <p:nvSpPr>
-          <p:cNvPr id="3" name="TextBox 2"/>
-          <p:cNvSpPr txBox="1"/>
-          <p:nvPr/>
-        </p:nvSpPr>
-        <p:spPr>
-          <a:xfrm>
-            <a:off x="731520" y="365760"/>
-            <a:ext cx="7315200" cy="365760"/>
-          </a:xfrm>
-          <a:prstGeom prst="rect">
-            <a:avLst/>
-          </a:prstGeom>
-          <a:noFill/>
-        </p:spPr>
-        <p:txBody>
-          <a:bodyPr wrap="square">
-            <a:spAutoFit/>
-          </a:bodyPr>
-          <a:lstStyle/>
-          <a:p>
-            <a:pPr>
-              <a:defRPr sz="1000" b="1">
-                <a:solidFill>
-                  <a:srgbClr val="76B900"/>
-                </a:solidFill>
-                <a:latin typeface="Arial"/>
-              </a:defRPr>
-            </a:pPr>
-            <a:r>
-              <a:t>●  ПІДСУМКИ   |   СЛАЙД 11 / 12</a:t>
-            </a:r>
-          </a:p>
-        </p:txBody>
-      </p:sp>
-      <p:sp>
-        <p:nvSpPr>
-          <p:cNvPr id="4" name="TextBox 3"/>
-          <p:cNvSpPr txBox="1"/>
-          <p:nvPr/>
-        </p:nvSpPr>
-        <p:spPr>
-          <a:xfrm>
-            <a:off x="731520" y="640080"/>
-            <a:ext cx="10515600" cy="731520"/>
-          </a:xfrm>
-          <a:prstGeom prst="rect">
-            <a:avLst/>
-          </a:prstGeom>
-          <a:noFill/>
-        </p:spPr>
-        <p:txBody>
-          <a:bodyPr wrap="square">
-            <a:spAutoFit/>
-          </a:bodyPr>
-          <a:lstStyle/>
-          <a:p>
-            <a:pPr>
-              <a:defRPr sz="2400" b="1">
-                <a:solidFill>
-                  <a:srgbClr val="FFFFFF"/>
-                </a:solidFill>
-                <a:latin typeface="Arial"/>
-              </a:defRPr>
-            </a:pPr>
-            <a:r>
-              <a:t>Зведене резюме доповіді за встановленим регламентом</a:t>
-            </a:r>
-          </a:p>
-        </p:txBody>
-      </p:sp>
-      <p:sp>
-        <p:nvSpPr>
-          <p:cNvPr id="5" name="Rounded Rectangle 4"/>
+          <p:cNvPr id="3" name="Rounded Rectangle 2"/>
           <p:cNvSpPr/>
           <p:nvPr/>
         </p:nvSpPr>
         <p:spPr>
           <a:xfrm>
-            <a:off x="731520" y="1645920"/>
-            <a:ext cx="5257800" cy="1280160"/>
+            <a:off x="731520" y="365760"/>
+            <a:ext cx="4114800" cy="329184"/>
           </a:xfrm>
           <a:prstGeom prst="roundRect">
             <a:avLst/>
           </a:prstGeom>
           <a:solidFill>
-            <a:srgbClr val="161E31"/>
+            <a:srgbClr val="14240C"/>
           </a:solidFill>
           <a:ln>
             <a:solidFill>
-              <a:srgbClr val="283750"/>
+              <a:srgbClr val="76B900"/>
             </a:solidFill>
           </a:ln>
         </p:spPr>
@@ -3859,54 +3687,79 @@
           </a:fontRef>
         </p:style>
         <p:txBody>
-          <a:bodyPr rtlCol="0" anchor="ctr" wrap="square"/>
+          <a:bodyPr rtlCol="0" anchor="ctr"/>
           <a:lstStyle/>
           <a:p>
             <a:pPr algn="ctr">
-              <a:defRPr b="1" sz="1300">
+              <a:defRPr sz="950" b="1">
                 <a:solidFill>
                   <a:srgbClr val="76B900"/>
                 </a:solidFill>
-              </a:defRPr>
-            </a:pPr>
-            <a:r>
-              <a:t>1. Мета:</a:t>
-            </a:r>
-          </a:p>
+                <a:latin typeface="Arial"/>
+              </a:defRPr>
+            </a:pPr>
+            <a:r>
+              <a:t>●  РЕГЛАМЕНТ: ПУНКТ 6   |   СЛАЙД 11 / 12</a:t>
+            </a:r>
+          </a:p>
+        </p:txBody>
+      </p:sp>
+      <p:sp>
+        <p:nvSpPr>
+          <p:cNvPr id="4" name="TextBox 3"/>
+          <p:cNvSpPr txBox="1"/>
+          <p:nvPr/>
+        </p:nvSpPr>
+        <p:spPr>
+          <a:xfrm>
+            <a:off x="731520" y="685800"/>
+            <a:ext cx="10698480" cy="685800"/>
+          </a:xfrm>
+          <a:prstGeom prst="rect">
+            <a:avLst/>
+          </a:prstGeom>
+          <a:noFill/>
+        </p:spPr>
+        <p:txBody>
+          <a:bodyPr wrap="square">
+            <a:spAutoFit/>
+          </a:bodyPr>
+          <a:lstStyle/>
           <a:p>
             <a:pPr>
-              <a:defRPr sz="1150">
+              <a:defRPr sz="2200" b="1">
                 <a:solidFill>
                   <a:srgbClr val="FFFFFF"/>
                 </a:solidFill>
-              </a:defRPr>
-            </a:pPr>
-            <a:r>
-              <a:t>Заміна важкої фізики трасування променів нейронним розрахунком світла.</a:t>
-            </a:r>
-          </a:p>
-        </p:txBody>
-      </p:sp>
-      <p:sp>
-        <p:nvSpPr>
-          <p:cNvPr id="6" name="Rounded Rectangle 5"/>
+                <a:latin typeface="Arial"/>
+              </a:defRPr>
+            </a:pPr>
+            <a:r>
+              <a:t>6. Перспективи розвитку: майбутнє комп'ютерної графіки</a:t>
+            </a:r>
+          </a:p>
+        </p:txBody>
+      </p:sp>
+      <p:sp>
+        <p:nvSpPr>
+          <p:cNvPr id="5" name="Rounded Rectangle 4"/>
           <p:cNvSpPr/>
           <p:nvPr/>
         </p:nvSpPr>
         <p:spPr>
           <a:xfrm>
-            <a:off x="6172200" y="1645920"/>
-            <a:ext cx="5257800" cy="1280160"/>
+            <a:off x="731520" y="1645920"/>
+            <a:ext cx="10698480" cy="1280160"/>
           </a:xfrm>
           <a:prstGeom prst="roundRect">
             <a:avLst/>
           </a:prstGeom>
           <a:solidFill>
-            <a:srgbClr val="161E31"/>
+            <a:srgbClr val="121826"/>
           </a:solidFill>
           <a:ln>
             <a:solidFill>
-              <a:srgbClr val="283750"/>
+              <a:srgbClr val="76B900"/>
             </a:solidFill>
           </a:ln>
         </p:spPr>
@@ -3929,50 +3782,50 @@
           <a:lstStyle/>
           <a:p>
             <a:pPr algn="ctr">
-              <a:defRPr b="1" sz="1300">
+              <a:defRPr sz="1400" b="1">
                 <a:solidFill>
                   <a:srgbClr val="76B900"/>
                 </a:solidFill>
               </a:defRPr>
             </a:pPr>
             <a:r>
-              <a:t>2. Актуальність:</a:t>
+              <a:t>1. Neural World Models (Світоглядний ШІ)</a:t>
             </a:r>
           </a:p>
           <a:p>
             <a:pPr>
               <a:defRPr sz="1150">
                 <a:solidFill>
-                  <a:srgbClr val="FFFFFF"/>
-                </a:solidFill>
-              </a:defRPr>
-            </a:pPr>
-            <a:r>
-              <a:t>Подолання кризи 16,7 мс у роздільності 4K та ліквідація пластикової графіки.</a:t>
-            </a:r>
-          </a:p>
-        </p:txBody>
-      </p:sp>
-      <p:sp>
-        <p:nvSpPr>
-          <p:cNvPr id="7" name="Rounded Rectangle 6"/>
+                  <a:srgbClr val="D1D5DB"/>
+                </a:solidFill>
+              </a:defRPr>
+            </a:pPr>
+            <a:r>
+              <a:t>Повний відхід від класичної растеризації. ШІ генеруватиме цілі віртуальні світи безпосередньо з фізичних законів і текстових промптів.</a:t>
+            </a:r>
+          </a:p>
+        </p:txBody>
+      </p:sp>
+      <p:sp>
+        <p:nvSpPr>
+          <p:cNvPr id="6" name="Rounded Rectangle 5"/>
           <p:cNvSpPr/>
           <p:nvPr/>
         </p:nvSpPr>
         <p:spPr>
           <a:xfrm>
             <a:off x="731520" y="3154680"/>
-            <a:ext cx="5257800" cy="1280160"/>
+            <a:ext cx="10698480" cy="1280160"/>
           </a:xfrm>
           <a:prstGeom prst="roundRect">
             <a:avLst/>
           </a:prstGeom>
           <a:solidFill>
-            <a:srgbClr val="161E31"/>
+            <a:srgbClr val="121826"/>
           </a:solidFill>
           <a:ln>
             <a:solidFill>
-              <a:srgbClr val="283750"/>
+              <a:srgbClr val="222D44"/>
             </a:solidFill>
           </a:ln>
         </p:spPr>
@@ -3995,50 +3848,50 @@
           <a:lstStyle/>
           <a:p>
             <a:pPr algn="ctr">
-              <a:defRPr b="1" sz="1300">
-                <a:solidFill>
-                  <a:srgbClr val="76B900"/>
-                </a:solidFill>
-              </a:defRPr>
-            </a:pPr>
-            <a:r>
-              <a:t>3. Сфера:</a:t>
+              <a:defRPr sz="1400" b="1">
+                <a:solidFill>
+                  <a:srgbClr val="FFFFFF"/>
+                </a:solidFill>
+              </a:defRPr>
+            </a:pPr>
+            <a:r>
+              <a:t>2. Єдина генеративна нейромодель</a:t>
             </a:r>
           </a:p>
           <a:p>
             <a:pPr>
               <a:defRPr sz="1150">
                 <a:solidFill>
-                  <a:srgbClr val="FFFFFF"/>
-                </a:solidFill>
-              </a:defRPr>
-            </a:pPr>
-            <a:r>
-              <a:t>AAA-ігри (NBA 2K27), Unreal Engine 5.5/6, віртуальне кіновиробництво.</a:t>
-            </a:r>
-          </a:p>
-        </p:txBody>
-      </p:sp>
-      <p:sp>
-        <p:nvSpPr>
-          <p:cNvPr id="8" name="Rounded Rectangle 7"/>
+                  <a:srgbClr val="D1D5DB"/>
+                </a:solidFill>
+              </a:defRPr>
+            </a:pPr>
+            <a:r>
+              <a:t>Об'єднання масштабування (Super Resolution), генерації кадрів, світла й звуку в одну уніфіковану мультимодальну модель реального часу.</a:t>
+            </a:r>
+          </a:p>
+        </p:txBody>
+      </p:sp>
+      <p:sp>
+        <p:nvSpPr>
+          <p:cNvPr id="7" name="Rounded Rectangle 6"/>
           <p:cNvSpPr/>
           <p:nvPr/>
         </p:nvSpPr>
         <p:spPr>
           <a:xfrm>
-            <a:off x="6172200" y="3154680"/>
-            <a:ext cx="5257800" cy="1280160"/>
+            <a:off x="731520" y="4663440"/>
+            <a:ext cx="10698480" cy="1280160"/>
           </a:xfrm>
           <a:prstGeom prst="roundRect">
             <a:avLst/>
           </a:prstGeom>
           <a:solidFill>
-            <a:srgbClr val="161E31"/>
+            <a:srgbClr val="121826"/>
           </a:solidFill>
           <a:ln>
             <a:solidFill>
-              <a:srgbClr val="283750"/>
+              <a:srgbClr val="222D44"/>
             </a:solidFill>
           </a:ln>
         </p:spPr>
@@ -4061,158 +3914,26 @@
           <a:lstStyle/>
           <a:p>
             <a:pPr algn="ctr">
-              <a:defRPr b="1" sz="1300">
-                <a:solidFill>
-                  <a:srgbClr val="76B900"/>
-                </a:solidFill>
-              </a:defRPr>
-            </a:pPr>
-            <a:r>
-              <a:t>4. Доступність:</a:t>
+              <a:defRPr sz="1400" b="1">
+                <a:solidFill>
+                  <a:srgbClr val="FFFFFF"/>
+                </a:solidFill>
+              </a:defRPr>
+            </a:pPr>
+            <a:r>
+              <a:t>3. Портування на портативні пристрої та NPU</a:t>
             </a:r>
           </a:p>
           <a:p>
             <a:pPr>
               <a:defRPr sz="1150">
                 <a:solidFill>
-                  <a:srgbClr val="FFFFFF"/>
-                </a:solidFill>
-              </a:defRPr>
-            </a:pPr>
-            <a:r>
-              <a:t>Безкоштовно для гравців з картами RTX через Game Ready Driver (жовтень 2026).</a:t>
-            </a:r>
-          </a:p>
-        </p:txBody>
-      </p:sp>
-      <p:sp>
-        <p:nvSpPr>
-          <p:cNvPr id="9" name="Rounded Rectangle 8"/>
-          <p:cNvSpPr/>
-          <p:nvPr/>
-        </p:nvSpPr>
-        <p:spPr>
-          <a:xfrm>
-            <a:off x="731520" y="4663440"/>
-            <a:ext cx="5257800" cy="1280160"/>
-          </a:xfrm>
-          <a:prstGeom prst="roundRect">
-            <a:avLst/>
-          </a:prstGeom>
-          <a:solidFill>
-            <a:srgbClr val="161E31"/>
-          </a:solidFill>
-          <a:ln>
-            <a:solidFill>
-              <a:srgbClr val="283750"/>
-            </a:solidFill>
-          </a:ln>
-        </p:spPr>
-        <p:style>
-          <a:lnRef idx="1">
-            <a:schemeClr val="accent1"/>
-          </a:lnRef>
-          <a:fillRef idx="3">
-            <a:schemeClr val="accent1"/>
-          </a:fillRef>
-          <a:effectRef idx="2">
-            <a:schemeClr val="accent1"/>
-          </a:effectRef>
-          <a:fontRef idx="minor">
-            <a:schemeClr val="lt1"/>
-          </a:fontRef>
-        </p:style>
-        <p:txBody>
-          <a:bodyPr rtlCol="0" anchor="ctr" wrap="square"/>
-          <a:lstStyle/>
-          <a:p>
-            <a:pPr algn="ctr">
-              <a:defRPr b="1" sz="1300">
-                <a:solidFill>
-                  <a:srgbClr val="76B900"/>
-                </a:solidFill>
-              </a:defRPr>
-            </a:pPr>
-            <a:r>
-              <a:t>5. Ефект:</a:t>
-            </a:r>
-          </a:p>
-          <a:p>
-            <a:pPr>
-              <a:defRPr sz="1150">
-                <a:solidFill>
-                  <a:srgbClr val="FFFFFF"/>
-                </a:solidFill>
-              </a:defRPr>
-            </a:pPr>
-            <a:r>
-              <a:t>Кінематографічне світло шкіри та тканин; +35% швидкості в Preset C.</a:t>
-            </a:r>
-          </a:p>
-        </p:txBody>
-      </p:sp>
-      <p:sp>
-        <p:nvSpPr>
-          <p:cNvPr id="10" name="Rounded Rectangle 9"/>
-          <p:cNvSpPr/>
-          <p:nvPr/>
-        </p:nvSpPr>
-        <p:spPr>
-          <a:xfrm>
-            <a:off x="6172200" y="4663440"/>
-            <a:ext cx="5257800" cy="1280160"/>
-          </a:xfrm>
-          <a:prstGeom prst="roundRect">
-            <a:avLst/>
-          </a:prstGeom>
-          <a:solidFill>
-            <a:srgbClr val="161E31"/>
-          </a:solidFill>
-          <a:ln>
-            <a:solidFill>
-              <a:srgbClr val="283750"/>
-            </a:solidFill>
-          </a:ln>
-        </p:spPr>
-        <p:style>
-          <a:lnRef idx="1">
-            <a:schemeClr val="accent1"/>
-          </a:lnRef>
-          <a:fillRef idx="3">
-            <a:schemeClr val="accent1"/>
-          </a:fillRef>
-          <a:effectRef idx="2">
-            <a:schemeClr val="accent1"/>
-          </a:effectRef>
-          <a:fontRef idx="minor">
-            <a:schemeClr val="lt1"/>
-          </a:fontRef>
-        </p:style>
-        <p:txBody>
-          <a:bodyPr rtlCol="0" anchor="ctr" wrap="square"/>
-          <a:lstStyle/>
-          <a:p>
-            <a:pPr algn="ctr">
-              <a:defRPr b="1" sz="1300">
-                <a:solidFill>
-                  <a:srgbClr val="76B900"/>
-                </a:solidFill>
-              </a:defRPr>
-            </a:pPr>
-            <a:r>
-              <a:t>6. Перспективи:</a:t>
-            </a:r>
-          </a:p>
-          <a:p>
-            <a:pPr>
-              <a:defRPr sz="1150">
-                <a:solidFill>
-                  <a:srgbClr val="FFFFFF"/>
-                </a:solidFill>
-              </a:defRPr>
-            </a:pPr>
-            <a:r>
-              <a:t>Перехід до Neural World Models — повної генерації світів нейромережами.</a:t>
+                  <a:srgbClr val="D1D5DB"/>
+                </a:solidFill>
+              </a:defRPr>
+            </a:pPr>
+            <a:r>
+              <a:t>Спеціалізована квантизація дозволить запускати нейронний рендеринг на смартфонах, планшетах і портативних консолях майбутнього.</a:t>
             </a:r>
           </a:p>
         </p:txBody>
@@ -4250,7 +3971,7 @@
             <a:avLst/>
           </a:prstGeom>
           <a:solidFill>
-            <a:srgbClr val="0B0F17"/>
+            <a:srgbClr val="0A0D14"/>
           </a:solidFill>
           <a:ln>
             <a:noFill/>
@@ -4293,7 +4014,7 @@
             <a:avLst/>
           </a:prstGeom>
           <a:solidFill>
-            <a:srgbClr val="161E31"/>
+            <a:srgbClr val="121826"/>
           </a:solidFill>
           <a:ln>
             <a:solidFill>
@@ -4320,7 +4041,7 @@
           <a:lstStyle/>
           <a:p>
             <a:pPr algn="ctr">
-              <a:defRPr b="1" sz="3600">
+              <a:defRPr sz="3600" b="1">
                 <a:solidFill>
                   <a:srgbClr val="76B900"/>
                 </a:solidFill>
@@ -4333,7 +4054,7 @@
           <a:p>
             <a:br/>
             <a:pPr algn="ctr">
-              <a:defRPr b="1" sz="2000">
+              <a:defRPr sz="2000" b="1">
                 <a:solidFill>
                   <a:srgbClr val="FFFFFF"/>
                 </a:solidFill>
@@ -4346,9 +4067,9 @@
           <a:p>
             <a:br/>
             <a:pPr algn="ctr">
-              <a:defRPr sz="1400">
-                <a:solidFill>
-                  <a:srgbClr val="9CA3AF"/>
+              <a:defRPr sz="1300">
+                <a:solidFill>
+                  <a:srgbClr val="22D3EE"/>
                 </a:solidFill>
               </a:defRPr>
             </a:pPr>
@@ -4391,7 +4112,7 @@
             <a:avLst/>
           </a:prstGeom>
           <a:solidFill>
-            <a:srgbClr val="0B0F17"/>
+            <a:srgbClr val="0A0D14"/>
           </a:solidFill>
           <a:ln>
             <a:noFill/>
@@ -4421,329 +4142,20 @@
       </p:sp>
       <p:sp>
         <p:nvSpPr>
-          <p:cNvPr id="3" name="TextBox 2"/>
-          <p:cNvSpPr txBox="1"/>
-          <p:nvPr/>
-        </p:nvSpPr>
-        <p:spPr>
-          <a:xfrm>
-            <a:off x="731520" y="365760"/>
-            <a:ext cx="7315200" cy="365760"/>
-          </a:xfrm>
-          <a:prstGeom prst="rect">
-            <a:avLst/>
-          </a:prstGeom>
-          <a:noFill/>
-        </p:spPr>
-        <p:txBody>
-          <a:bodyPr wrap="square">
-            <a:spAutoFit/>
-          </a:bodyPr>
-          <a:lstStyle/>
-          <a:p>
-            <a:pPr>
-              <a:defRPr sz="1000" b="1">
-                <a:solidFill>
-                  <a:srgbClr val="76B900"/>
-                </a:solidFill>
-                <a:latin typeface="Arial"/>
-              </a:defRPr>
-            </a:pPr>
-            <a:r>
-              <a:t>●  ВСТУПНИЙ КОНТЕКСТ   |   СЛАЙД 02 / 12</a:t>
-            </a:r>
-          </a:p>
-        </p:txBody>
-      </p:sp>
-      <p:sp>
-        <p:nvSpPr>
-          <p:cNvPr id="4" name="TextBox 3"/>
-          <p:cNvSpPr txBox="1"/>
-          <p:nvPr/>
-        </p:nvSpPr>
-        <p:spPr>
-          <a:xfrm>
-            <a:off x="731520" y="640080"/>
-            <a:ext cx="10515600" cy="731520"/>
-          </a:xfrm>
-          <a:prstGeom prst="rect">
-            <a:avLst/>
-          </a:prstGeom>
-          <a:noFill/>
-        </p:spPr>
-        <p:txBody>
-          <a:bodyPr wrap="square">
-            <a:spAutoFit/>
-          </a:bodyPr>
-          <a:lstStyle/>
-          <a:p>
-            <a:pPr>
-              <a:defRPr sz="2400" b="1">
-                <a:solidFill>
-                  <a:srgbClr val="FFFFFF"/>
-                </a:solidFill>
-                <a:latin typeface="Arial"/>
-              </a:defRPr>
-            </a:pPr>
-            <a:r>
-              <a:t>Еволюція технології: від апскейлу до нейронного рендерингу</a:t>
-            </a:r>
-          </a:p>
-        </p:txBody>
-      </p:sp>
-      <p:sp>
-        <p:nvSpPr>
-          <p:cNvPr id="5" name="Rounded Rectangle 4"/>
+          <p:cNvPr id="3" name="Rounded Rectangle 2"/>
           <p:cNvSpPr/>
           <p:nvPr/>
         </p:nvSpPr>
         <p:spPr>
           <a:xfrm>
-            <a:off x="731520" y="1645920"/>
-            <a:ext cx="2560320" cy="4389120"/>
+            <a:off x="731520" y="365760"/>
+            <a:ext cx="4114800" cy="329184"/>
           </a:xfrm>
           <a:prstGeom prst="roundRect">
             <a:avLst/>
           </a:prstGeom>
           <a:solidFill>
-            <a:srgbClr val="161E31"/>
-          </a:solidFill>
-          <a:ln>
-            <a:solidFill>
-              <a:srgbClr val="283750"/>
-            </a:solidFill>
-          </a:ln>
-        </p:spPr>
-        <p:style>
-          <a:lnRef idx="1">
-            <a:schemeClr val="accent1"/>
-          </a:lnRef>
-          <a:fillRef idx="3">
-            <a:schemeClr val="accent1"/>
-          </a:fillRef>
-          <a:effectRef idx="2">
-            <a:schemeClr val="accent1"/>
-          </a:effectRef>
-          <a:fontRef idx="minor">
-            <a:schemeClr val="lt1"/>
-          </a:fontRef>
-        </p:style>
-        <p:txBody>
-          <a:bodyPr rtlCol="0" anchor="ctr" wrap="square"/>
-          <a:lstStyle/>
-          <a:p>
-            <a:pPr algn="ctr">
-              <a:defRPr b="1" sz="1300">
-                <a:solidFill>
-                  <a:srgbClr val="9CA3AF"/>
-                </a:solidFill>
-              </a:defRPr>
-            </a:pPr>
-            <a:r>
-              <a:t>DLSS 1.0 (2018)</a:t>
-            </a:r>
-          </a:p>
-          <a:p>
-            <a:pPr>
-              <a:defRPr b="1" sz="1500">
-                <a:solidFill>
-                  <a:srgbClr val="FFFFFF"/>
-                </a:solidFill>
-              </a:defRPr>
-            </a:pPr>
-            <a:r>
-              <a:t>Окремі мережі</a:t>
-            </a:r>
-          </a:p>
-          <a:p>
-            <a:br/>
-            <a:pPr>
-              <a:defRPr sz="1100">
-                <a:solidFill>
-                  <a:srgbClr val="9CA3AF"/>
-                </a:solidFill>
-              </a:defRPr>
-            </a:pPr>
-            <a:r>
-              <a:t>Тренувалася індивідуально для кожної гри. Часто створювала мильну картинку й артефакти.</a:t>
-            </a:r>
-          </a:p>
-        </p:txBody>
-      </p:sp>
-      <p:sp>
-        <p:nvSpPr>
-          <p:cNvPr id="6" name="Rounded Rectangle 5"/>
-          <p:cNvSpPr/>
-          <p:nvPr/>
-        </p:nvSpPr>
-        <p:spPr>
-          <a:xfrm>
-            <a:off x="3429000" y="1645920"/>
-            <a:ext cx="2560320" cy="4389120"/>
-          </a:xfrm>
-          <a:prstGeom prst="roundRect">
-            <a:avLst/>
-          </a:prstGeom>
-          <a:solidFill>
-            <a:srgbClr val="161E31"/>
-          </a:solidFill>
-          <a:ln>
-            <a:solidFill>
-              <a:srgbClr val="283750"/>
-            </a:solidFill>
-          </a:ln>
-        </p:spPr>
-        <p:style>
-          <a:lnRef idx="1">
-            <a:schemeClr val="accent1"/>
-          </a:lnRef>
-          <a:fillRef idx="3">
-            <a:schemeClr val="accent1"/>
-          </a:fillRef>
-          <a:effectRef idx="2">
-            <a:schemeClr val="accent1"/>
-          </a:effectRef>
-          <a:fontRef idx="minor">
-            <a:schemeClr val="lt1"/>
-          </a:fontRef>
-        </p:style>
-        <p:txBody>
-          <a:bodyPr rtlCol="0" anchor="ctr" wrap="square"/>
-          <a:lstStyle/>
-          <a:p>
-            <a:pPr algn="ctr">
-              <a:defRPr b="1" sz="1300">
-                <a:solidFill>
-                  <a:srgbClr val="9CA3AF"/>
-                </a:solidFill>
-              </a:defRPr>
-            </a:pPr>
-            <a:r>
-              <a:t>DLSS 2.0 (2020)</a:t>
-            </a:r>
-          </a:p>
-          <a:p>
-            <a:pPr>
-              <a:defRPr b="1" sz="1500">
-                <a:solidFill>
-                  <a:srgbClr val="FFFFFF"/>
-                </a:solidFill>
-              </a:defRPr>
-            </a:pPr>
-            <a:r>
-              <a:t>Super Resolution</a:t>
-            </a:r>
-          </a:p>
-          <a:p>
-            <a:br/>
-            <a:pPr>
-              <a:defRPr sz="1100">
-                <a:solidFill>
-                  <a:srgbClr val="9CA3AF"/>
-                </a:solidFill>
-              </a:defRPr>
-            </a:pPr>
-            <a:r>
-              <a:t>Універсальна модель: просторово-часова історія (temporal) + вектори руху. Домальовує 4K з 1080p.</a:t>
-            </a:r>
-          </a:p>
-        </p:txBody>
-      </p:sp>
-      <p:sp>
-        <p:nvSpPr>
-          <p:cNvPr id="7" name="Rounded Rectangle 6"/>
-          <p:cNvSpPr/>
-          <p:nvPr/>
-        </p:nvSpPr>
-        <p:spPr>
-          <a:xfrm>
-            <a:off x="6126480" y="1645920"/>
-            <a:ext cx="2560320" cy="4389120"/>
-          </a:xfrm>
-          <a:prstGeom prst="roundRect">
-            <a:avLst/>
-          </a:prstGeom>
-          <a:solidFill>
-            <a:srgbClr val="161E31"/>
-          </a:solidFill>
-          <a:ln>
-            <a:solidFill>
-              <a:srgbClr val="283750"/>
-            </a:solidFill>
-          </a:ln>
-        </p:spPr>
-        <p:style>
-          <a:lnRef idx="1">
-            <a:schemeClr val="accent1"/>
-          </a:lnRef>
-          <a:fillRef idx="3">
-            <a:schemeClr val="accent1"/>
-          </a:fillRef>
-          <a:effectRef idx="2">
-            <a:schemeClr val="accent1"/>
-          </a:effectRef>
-          <a:fontRef idx="minor">
-            <a:schemeClr val="lt1"/>
-          </a:fontRef>
-        </p:style>
-        <p:txBody>
-          <a:bodyPr rtlCol="0" anchor="ctr" wrap="square"/>
-          <a:lstStyle/>
-          <a:p>
-            <a:pPr algn="ctr">
-              <a:defRPr b="1" sz="1300">
-                <a:solidFill>
-                  <a:srgbClr val="9CA3AF"/>
-                </a:solidFill>
-              </a:defRPr>
-            </a:pPr>
-            <a:r>
-              <a:t>DLSS 3 &amp; 4 (2022-2025)</a:t>
-            </a:r>
-          </a:p>
-          <a:p>
-            <a:pPr>
-              <a:defRPr b="1" sz="1500">
-                <a:solidFill>
-                  <a:srgbClr val="FFFFFF"/>
-                </a:solidFill>
-              </a:defRPr>
-            </a:pPr>
-            <a:r>
-              <a:t>Frame Generation</a:t>
-            </a:r>
-          </a:p>
-          <a:p>
-            <a:br/>
-            <a:pPr>
-              <a:defRPr sz="1100">
-                <a:solidFill>
-                  <a:srgbClr val="9CA3AF"/>
-                </a:solidFill>
-              </a:defRPr>
-            </a:pPr>
-            <a:r>
-              <a:t>Генерація проміжних кадрів за допомогою Optical Flow. Множники кадрів від 2x до 4x MFG.</a:t>
-            </a:r>
-          </a:p>
-        </p:txBody>
-      </p:sp>
-      <p:sp>
-        <p:nvSpPr>
-          <p:cNvPr id="8" name="Rounded Rectangle 7"/>
-          <p:cNvSpPr/>
-          <p:nvPr/>
-        </p:nvSpPr>
-        <p:spPr>
-          <a:xfrm>
-            <a:off x="8823960" y="1645920"/>
-            <a:ext cx="2560320" cy="4389120"/>
-          </a:xfrm>
-          <a:prstGeom prst="roundRect">
-            <a:avLst/>
-          </a:prstGeom>
-          <a:solidFill>
-            <a:srgbClr val="161E31"/>
+            <a:srgbClr val="14240C"/>
           </a:solidFill>
           <a:ln>
             <a:solidFill>
@@ -4766,30 +4178,133 @@
           </a:fontRef>
         </p:style>
         <p:txBody>
+          <a:bodyPr rtlCol="0" anchor="ctr"/>
+          <a:lstStyle/>
+          <a:p>
+            <a:pPr algn="ctr">
+              <a:defRPr sz="950" b="1">
+                <a:solidFill>
+                  <a:srgbClr val="76B900"/>
+                </a:solidFill>
+                <a:latin typeface="Arial"/>
+              </a:defRPr>
+            </a:pPr>
+            <a:r>
+              <a:t>●  ВСТУПНИЙ КОНТЕКСТ   |   СЛАЙД 02 / 12</a:t>
+            </a:r>
+          </a:p>
+        </p:txBody>
+      </p:sp>
+      <p:sp>
+        <p:nvSpPr>
+          <p:cNvPr id="4" name="TextBox 3"/>
+          <p:cNvSpPr txBox="1"/>
+          <p:nvPr/>
+        </p:nvSpPr>
+        <p:spPr>
+          <a:xfrm>
+            <a:off x="731520" y="685800"/>
+            <a:ext cx="10698480" cy="685800"/>
+          </a:xfrm>
+          <a:prstGeom prst="rect">
+            <a:avLst/>
+          </a:prstGeom>
+          <a:noFill/>
+        </p:spPr>
+        <p:txBody>
+          <a:bodyPr wrap="square">
+            <a:spAutoFit/>
+          </a:bodyPr>
+          <a:lstStyle/>
+          <a:p>
+            <a:pPr>
+              <a:defRPr sz="2200" b="1">
+                <a:solidFill>
+                  <a:srgbClr val="FFFFFF"/>
+                </a:solidFill>
+                <a:latin typeface="Arial"/>
+              </a:defRPr>
+            </a:pPr>
+            <a:r>
+              <a:t>Еволюція технології за 8 років: від простого масштабування до нейронного світла</a:t>
+            </a:r>
+          </a:p>
+        </p:txBody>
+      </p:sp>
+      <p:sp>
+        <p:nvSpPr>
+          <p:cNvPr id="5" name="Rounded Rectangle 4"/>
+          <p:cNvSpPr/>
+          <p:nvPr/>
+        </p:nvSpPr>
+        <p:spPr>
+          <a:xfrm>
+            <a:off x="731520" y="1645920"/>
+            <a:ext cx="2560320" cy="4572000"/>
+          </a:xfrm>
+          <a:prstGeom prst="roundRect">
+            <a:avLst/>
+          </a:prstGeom>
+          <a:solidFill>
+            <a:srgbClr val="121826"/>
+          </a:solidFill>
+          <a:ln>
+            <a:solidFill>
+              <a:srgbClr val="222D44"/>
+            </a:solidFill>
+          </a:ln>
+        </p:spPr>
+        <p:style>
+          <a:lnRef idx="1">
+            <a:schemeClr val="accent1"/>
+          </a:lnRef>
+          <a:fillRef idx="3">
+            <a:schemeClr val="accent1"/>
+          </a:fillRef>
+          <a:effectRef idx="2">
+            <a:schemeClr val="accent1"/>
+          </a:effectRef>
+          <a:fontRef idx="minor">
+            <a:schemeClr val="lt1"/>
+          </a:fontRef>
+        </p:style>
+        <p:txBody>
           <a:bodyPr rtlCol="0" anchor="ctr" wrap="square"/>
           <a:lstStyle/>
           <a:p>
             <a:pPr algn="ctr">
-              <a:defRPr b="1" sz="1300">
+              <a:defRPr sz="1200" b="1">
+                <a:solidFill>
+                  <a:srgbClr val="9CA3AF"/>
+                </a:solidFill>
+              </a:defRPr>
+            </a:pPr>
+            <a:r>
+              <a:t>2018</a:t>
+            </a:r>
+          </a:p>
+          <a:p>
+            <a:pPr>
+              <a:defRPr sz="1800" b="1">
+                <a:solidFill>
+                  <a:srgbClr val="FFFFFF"/>
+                </a:solidFill>
+              </a:defRPr>
+            </a:pPr>
+            <a:r>
+              <a:t>DLSS 1.0</a:t>
+            </a:r>
+          </a:p>
+          <a:p>
+            <a:pPr>
+              <a:defRPr sz="1200" b="1">
                 <a:solidFill>
                   <a:srgbClr val="76B900"/>
                 </a:solidFill>
               </a:defRPr>
             </a:pPr>
             <a:r>
-              <a:t>DLSS 5 (Осінь 2026)</a:t>
-            </a:r>
-          </a:p>
-          <a:p>
-            <a:pPr>
-              <a:defRPr b="1" sz="1500">
-                <a:solidFill>
-                  <a:srgbClr val="FFFFFF"/>
-                </a:solidFill>
-              </a:defRPr>
-            </a:pPr>
-            <a:r>
-              <a:t>Neural Rendering</a:t>
+              <a:t>Окремі моделі</a:t>
             </a:r>
           </a:p>
           <a:p>
@@ -4797,12 +4312,285 @@
             <a:pPr>
               <a:defRPr sz="1100">
                 <a:solidFill>
+                  <a:srgbClr val="D1D5DB"/>
+                </a:solidFill>
+              </a:defRPr>
+            </a:pPr>
+            <a:r>
+              <a:t>Тренування для кожної гри окремо. Відсутність історії кадрів, часті артефакти й мило.</a:t>
+            </a:r>
+          </a:p>
+        </p:txBody>
+      </p:sp>
+      <p:sp>
+        <p:nvSpPr>
+          <p:cNvPr id="6" name="Rounded Rectangle 5"/>
+          <p:cNvSpPr/>
+          <p:nvPr/>
+        </p:nvSpPr>
+        <p:spPr>
+          <a:xfrm>
+            <a:off x="3429000" y="1645920"/>
+            <a:ext cx="2560320" cy="4572000"/>
+          </a:xfrm>
+          <a:prstGeom prst="roundRect">
+            <a:avLst/>
+          </a:prstGeom>
+          <a:solidFill>
+            <a:srgbClr val="121826"/>
+          </a:solidFill>
+          <a:ln>
+            <a:solidFill>
+              <a:srgbClr val="222D44"/>
+            </a:solidFill>
+          </a:ln>
+        </p:spPr>
+        <p:style>
+          <a:lnRef idx="1">
+            <a:schemeClr val="accent1"/>
+          </a:lnRef>
+          <a:fillRef idx="3">
+            <a:schemeClr val="accent1"/>
+          </a:fillRef>
+          <a:effectRef idx="2">
+            <a:schemeClr val="accent1"/>
+          </a:effectRef>
+          <a:fontRef idx="minor">
+            <a:schemeClr val="lt1"/>
+          </a:fontRef>
+        </p:style>
+        <p:txBody>
+          <a:bodyPr rtlCol="0" anchor="ctr" wrap="square"/>
+          <a:lstStyle/>
+          <a:p>
+            <a:pPr algn="ctr">
+              <a:defRPr sz="1200" b="1">
+                <a:solidFill>
                   <a:srgbClr val="9CA3AF"/>
                 </a:solidFill>
               </a:defRPr>
             </a:pPr>
             <a:r>
-              <a:t>ШІ бере на себе повний розрахунок освітлення, шкіри та матеріалів замість Path Tracing.</a:t>
+              <a:t>2020</a:t>
+            </a:r>
+          </a:p>
+          <a:p>
+            <a:pPr>
+              <a:defRPr sz="1800" b="1">
+                <a:solidFill>
+                  <a:srgbClr val="FFFFFF"/>
+                </a:solidFill>
+              </a:defRPr>
+            </a:pPr>
+            <a:r>
+              <a:t>DLSS 2.0</a:t>
+            </a:r>
+          </a:p>
+          <a:p>
+            <a:pPr>
+              <a:defRPr sz="1200" b="1">
+                <a:solidFill>
+                  <a:srgbClr val="76B900"/>
+                </a:solidFill>
+              </a:defRPr>
+            </a:pPr>
+            <a:r>
+              <a:t>Super Resolution</a:t>
+            </a:r>
+          </a:p>
+          <a:p>
+            <a:br/>
+            <a:pPr>
+              <a:defRPr sz="1100">
+                <a:solidFill>
+                  <a:srgbClr val="D1D5DB"/>
+                </a:solidFill>
+              </a:defRPr>
+            </a:pPr>
+            <a:r>
+              <a:t>Просторово-часова історія (Temporal) + вектори руху. Домальовує 4K із 1080p у 4 рази швидше.</a:t>
+            </a:r>
+          </a:p>
+        </p:txBody>
+      </p:sp>
+      <p:sp>
+        <p:nvSpPr>
+          <p:cNvPr id="7" name="Rounded Rectangle 6"/>
+          <p:cNvSpPr/>
+          <p:nvPr/>
+        </p:nvSpPr>
+        <p:spPr>
+          <a:xfrm>
+            <a:off x="6126480" y="1645920"/>
+            <a:ext cx="2560320" cy="4572000"/>
+          </a:xfrm>
+          <a:prstGeom prst="roundRect">
+            <a:avLst/>
+          </a:prstGeom>
+          <a:solidFill>
+            <a:srgbClr val="121826"/>
+          </a:solidFill>
+          <a:ln>
+            <a:solidFill>
+              <a:srgbClr val="222D44"/>
+            </a:solidFill>
+          </a:ln>
+        </p:spPr>
+        <p:style>
+          <a:lnRef idx="1">
+            <a:schemeClr val="accent1"/>
+          </a:lnRef>
+          <a:fillRef idx="3">
+            <a:schemeClr val="accent1"/>
+          </a:fillRef>
+          <a:effectRef idx="2">
+            <a:schemeClr val="accent1"/>
+          </a:effectRef>
+          <a:fontRef idx="minor">
+            <a:schemeClr val="lt1"/>
+          </a:fontRef>
+        </p:style>
+        <p:txBody>
+          <a:bodyPr rtlCol="0" anchor="ctr" wrap="square"/>
+          <a:lstStyle/>
+          <a:p>
+            <a:pPr algn="ctr">
+              <a:defRPr sz="1200" b="1">
+                <a:solidFill>
+                  <a:srgbClr val="9CA3AF"/>
+                </a:solidFill>
+              </a:defRPr>
+            </a:pPr>
+            <a:r>
+              <a:t>2022–25</a:t>
+            </a:r>
+          </a:p>
+          <a:p>
+            <a:pPr>
+              <a:defRPr sz="1800" b="1">
+                <a:solidFill>
+                  <a:srgbClr val="FFFFFF"/>
+                </a:solidFill>
+              </a:defRPr>
+            </a:pPr>
+            <a:r>
+              <a:t>DLSS 3 &amp; 4</a:t>
+            </a:r>
+          </a:p>
+          <a:p>
+            <a:pPr>
+              <a:defRPr sz="1200" b="1">
+                <a:solidFill>
+                  <a:srgbClr val="76B900"/>
+                </a:solidFill>
+              </a:defRPr>
+            </a:pPr>
+            <a:r>
+              <a:t>Frame Generation</a:t>
+            </a:r>
+          </a:p>
+          <a:p>
+            <a:br/>
+            <a:pPr>
+              <a:defRPr sz="1100">
+                <a:solidFill>
+                  <a:srgbClr val="D1D5DB"/>
+                </a:solidFill>
+              </a:defRPr>
+            </a:pPr>
+            <a:r>
+              <a:t>ШІ генерує проміжні штучні кадри за допомогою Optical Flow. Множники плавності 2x та 4x MFG.</a:t>
+            </a:r>
+          </a:p>
+        </p:txBody>
+      </p:sp>
+      <p:sp>
+        <p:nvSpPr>
+          <p:cNvPr id="8" name="Rounded Rectangle 7"/>
+          <p:cNvSpPr/>
+          <p:nvPr/>
+        </p:nvSpPr>
+        <p:spPr>
+          <a:xfrm>
+            <a:off x="8823960" y="1645920"/>
+            <a:ext cx="2560320" cy="4572000"/>
+          </a:xfrm>
+          <a:prstGeom prst="roundRect">
+            <a:avLst/>
+          </a:prstGeom>
+          <a:solidFill>
+            <a:srgbClr val="121826"/>
+          </a:solidFill>
+          <a:ln>
+            <a:solidFill>
+              <a:srgbClr val="76B900"/>
+            </a:solidFill>
+          </a:ln>
+        </p:spPr>
+        <p:style>
+          <a:lnRef idx="1">
+            <a:schemeClr val="accent1"/>
+          </a:lnRef>
+          <a:fillRef idx="3">
+            <a:schemeClr val="accent1"/>
+          </a:fillRef>
+          <a:effectRef idx="2">
+            <a:schemeClr val="accent1"/>
+          </a:effectRef>
+          <a:fontRef idx="minor">
+            <a:schemeClr val="lt1"/>
+          </a:fontRef>
+        </p:style>
+        <p:txBody>
+          <a:bodyPr rtlCol="0" anchor="ctr" wrap="square"/>
+          <a:lstStyle/>
+          <a:p>
+            <a:pPr algn="ctr">
+              <a:defRPr sz="1200" b="1">
+                <a:solidFill>
+                  <a:srgbClr val="76B900"/>
+                </a:solidFill>
+              </a:defRPr>
+            </a:pPr>
+            <a:r>
+              <a:t>Жовтень 2026</a:t>
+            </a:r>
+          </a:p>
+          <a:p>
+            <a:pPr>
+              <a:defRPr sz="1800" b="1">
+                <a:solidFill>
+                  <a:srgbClr val="FFFFFF"/>
+                </a:solidFill>
+              </a:defRPr>
+            </a:pPr>
+            <a:r>
+              <a:t>DLSS 5</a:t>
+            </a:r>
+          </a:p>
+          <a:p>
+            <a:pPr>
+              <a:defRPr sz="1200" b="1">
+                <a:solidFill>
+                  <a:srgbClr val="22D3EE"/>
+                </a:solidFill>
+              </a:defRPr>
+            </a:pPr>
+            <a:r>
+              <a:t>Neural Rendering</a:t>
+            </a:r>
+          </a:p>
+          <a:p>
+            <a:br/>
+            <a:pPr>
+              <a:defRPr sz="1100">
+                <a:solidFill>
+                  <a:srgbClr val="D1D5DB"/>
+                </a:solidFill>
+              </a:defRPr>
+            </a:pPr>
+            <a:r>
+              <a:t>ШІ прораховує світло та матеріали замість Path Tracing. Жовтневий стрибок швидкості у 2 рази.</a:t>
             </a:r>
           </a:p>
         </p:txBody>
@@ -4840,7 +4628,7 @@
             <a:avLst/>
           </a:prstGeom>
           <a:solidFill>
-            <a:srgbClr val="0B0F17"/>
+            <a:srgbClr val="0A0D14"/>
           </a:solidFill>
           <a:ln>
             <a:noFill/>
@@ -4870,92 +4658,20 @@
       </p:sp>
       <p:sp>
         <p:nvSpPr>
-          <p:cNvPr id="3" name="TextBox 2"/>
-          <p:cNvSpPr txBox="1"/>
-          <p:nvPr/>
-        </p:nvSpPr>
-        <p:spPr>
-          <a:xfrm>
-            <a:off x="731520" y="365760"/>
-            <a:ext cx="7315200" cy="365760"/>
-          </a:xfrm>
-          <a:prstGeom prst="rect">
-            <a:avLst/>
-          </a:prstGeom>
-          <a:noFill/>
-        </p:spPr>
-        <p:txBody>
-          <a:bodyPr wrap="square">
-            <a:spAutoFit/>
-          </a:bodyPr>
-          <a:lstStyle/>
-          <a:p>
-            <a:pPr>
-              <a:defRPr sz="1000" b="1">
-                <a:solidFill>
-                  <a:srgbClr val="76B900"/>
-                </a:solidFill>
-                <a:latin typeface="Arial"/>
-              </a:defRPr>
-            </a:pPr>
-            <a:r>
-              <a:t>●  РЕГЛАМЕНТ: ПУНКТ 1   |   СЛАЙД 03 / 12</a:t>
-            </a:r>
-          </a:p>
-        </p:txBody>
-      </p:sp>
-      <p:sp>
-        <p:nvSpPr>
-          <p:cNvPr id="4" name="TextBox 3"/>
-          <p:cNvSpPr txBox="1"/>
-          <p:nvPr/>
-        </p:nvSpPr>
-        <p:spPr>
-          <a:xfrm>
-            <a:off x="731520" y="640080"/>
-            <a:ext cx="10515600" cy="731520"/>
-          </a:xfrm>
-          <a:prstGeom prst="rect">
-            <a:avLst/>
-          </a:prstGeom>
-          <a:noFill/>
-        </p:spPr>
-        <p:txBody>
-          <a:bodyPr wrap="square">
-            <a:spAutoFit/>
-          </a:bodyPr>
-          <a:lstStyle/>
-          <a:p>
-            <a:pPr>
-              <a:defRPr sz="2400" b="1">
-                <a:solidFill>
-                  <a:srgbClr val="FFFFFF"/>
-                </a:solidFill>
-                <a:latin typeface="Arial"/>
-              </a:defRPr>
-            </a:pPr>
-            <a:r>
-              <a:t>1. Мета новинки: для чого створено DLSS 5</a:t>
-            </a:r>
-          </a:p>
-        </p:txBody>
-      </p:sp>
-      <p:sp>
-        <p:nvSpPr>
-          <p:cNvPr id="5" name="Rounded Rectangle 4"/>
+          <p:cNvPr id="3" name="Rounded Rectangle 2"/>
           <p:cNvSpPr/>
           <p:nvPr/>
         </p:nvSpPr>
         <p:spPr>
           <a:xfrm>
-            <a:off x="731520" y="1645920"/>
-            <a:ext cx="5212080" cy="4389120"/>
+            <a:off x="731520" y="365760"/>
+            <a:ext cx="4114800" cy="329184"/>
           </a:xfrm>
           <a:prstGeom prst="roundRect">
             <a:avLst/>
           </a:prstGeom>
           <a:solidFill>
-            <a:srgbClr val="161E31"/>
+            <a:srgbClr val="14240C"/>
           </a:solidFill>
           <a:ln>
             <a:solidFill>
@@ -4978,121 +4694,62 @@
           </a:fontRef>
         </p:style>
         <p:txBody>
-          <a:bodyPr rtlCol="0" anchor="ctr" wrap="square"/>
+          <a:bodyPr rtlCol="0" anchor="ctr"/>
           <a:lstStyle/>
           <a:p>
             <a:pPr algn="ctr">
-              <a:defRPr b="1" sz="1400">
+              <a:defRPr sz="950" b="1">
                 <a:solidFill>
                   <a:srgbClr val="76B900"/>
                 </a:solidFill>
-              </a:defRPr>
-            </a:pPr>
-            <a:r>
-              <a:t>🎯 ГОЛОВНА МЕТА</a:t>
-            </a:r>
-          </a:p>
-          <a:p>
-            <a:pPr>
-              <a:defRPr b="1" sz="1800">
-                <a:solidFill>
-                  <a:srgbClr val="FFFFFF"/>
-                </a:solidFill>
-              </a:defRPr>
-            </a:pPr>
-            <a:r>
-              <a:t>Заміна математичного трасування променів генеративним ШІ</a:t>
-            </a:r>
-          </a:p>
-          <a:p>
-            <a:br/>
-            <a:pPr>
-              <a:defRPr sz="1200">
-                <a:solidFill>
-                  <a:srgbClr val="9CA3AF"/>
-                </a:solidFill>
-              </a:defRPr>
-            </a:pPr>
-            <a:r>
-              <a:t>• Подолати межу класичного рендерингу: фізичний розрахунок світла (Path Tracing) вимагає нереальних обчислювальних ресурсів.</a:t>
-            </a:r>
-          </a:p>
-          <a:p>
-            <a:br/>
-            <a:pPr>
-              <a:defRPr sz="1200">
-                <a:solidFill>
-                  <a:srgbClr val="9CA3AF"/>
-                </a:solidFill>
-              </a:defRPr>
-            </a:pPr>
-            <a:r>
-              <a:t>• Замість мільярдів математичних променів використати нейромережу, навчену на законах оптики.</a:t>
-            </a:r>
-          </a:p>
-          <a:p>
-            <a:br/>
-            <a:pPr>
-              <a:defRPr sz="1200">
-                <a:solidFill>
-                  <a:srgbClr val="9CA3AF"/>
-                </a:solidFill>
-              </a:defRPr>
-            </a:pPr>
-            <a:r>
-              <a:t>• Забезпечити кінематографічний фотореалізм без втрати інтерактивності в реальному часі.</a:t>
-            </a:r>
-          </a:p>
-        </p:txBody>
-      </p:sp>
-      <p:sp>
-        <p:nvSpPr>
-          <p:cNvPr id="6" name="Rounded Rectangle 5"/>
-          <p:cNvSpPr/>
+                <a:latin typeface="Arial"/>
+              </a:defRPr>
+            </a:pPr>
+            <a:r>
+              <a:t>●  РЕГЛАМЕНТ: ПУНКТ 1   |   СЛАЙД 03 / 12</a:t>
+            </a:r>
+          </a:p>
+        </p:txBody>
+      </p:sp>
+      <p:sp>
+        <p:nvSpPr>
+          <p:cNvPr id="4" name="TextBox 3"/>
+          <p:cNvSpPr txBox="1"/>
           <p:nvPr/>
         </p:nvSpPr>
         <p:spPr>
           <a:xfrm>
-            <a:off x="6217920" y="1645920"/>
-            <a:ext cx="5212080" cy="4389120"/>
-          </a:xfrm>
-          <a:prstGeom prst="roundRect">
+            <a:off x="731520" y="685800"/>
+            <a:ext cx="10698480" cy="685800"/>
+          </a:xfrm>
+          <a:prstGeom prst="rect">
             <a:avLst/>
           </a:prstGeom>
-          <a:solidFill>
-            <a:srgbClr val="161E31"/>
-          </a:solidFill>
-          <a:ln>
-            <a:solidFill>
-              <a:srgbClr val="283750"/>
-            </a:solidFill>
-          </a:ln>
-        </p:spPr>
-        <p:style>
-          <a:lnRef idx="1">
-            <a:schemeClr val="accent1"/>
-          </a:lnRef>
-          <a:fillRef idx="3">
-            <a:schemeClr val="accent1"/>
-          </a:fillRef>
-          <a:effectRef idx="2">
-            <a:schemeClr val="accent1"/>
-          </a:effectRef>
-          <a:fontRef idx="minor">
-            <a:schemeClr val="lt1"/>
-          </a:fontRef>
-        </p:style>
-        <p:txBody>
-          <a:bodyPr rtlCol="0" anchor="ctr"/>
-          <a:lstStyle/>
-          <a:p>
-            <a:pPr algn="ctr"/>
+          <a:noFill/>
+        </p:spPr>
+        <p:txBody>
+          <a:bodyPr wrap="square">
+            <a:spAutoFit/>
+          </a:bodyPr>
+          <a:lstStyle/>
+          <a:p>
+            <a:pPr>
+              <a:defRPr sz="2200" b="1">
+                <a:solidFill>
+                  <a:srgbClr val="FFFFFF"/>
+                </a:solidFill>
+                <a:latin typeface="Arial"/>
+              </a:defRPr>
+            </a:pPr>
+            <a:r>
+              <a:t>1. Мета новинки: навіщо створено DLSS 5</a:t>
+            </a:r>
           </a:p>
         </p:txBody>
       </p:sp>
       <p:pic>
         <p:nvPicPr>
-          <p:cNvPr id="7" name="Picture 6" descr="dlss_concept.jpg"/>
+          <p:cNvPr id="5" name="Picture 4" descr="pipeline_dragon.jpg"/>
           <p:cNvPicPr>
             <a:picLocks noChangeAspect="1"/>
           </p:cNvPicPr>
@@ -5106,8 +4763,8 @@
         </p:blipFill>
         <p:spPr>
           <a:xfrm>
-            <a:off x="6400800" y="1828800"/>
-            <a:ext cx="4846320" cy="2560320"/>
+            <a:off x="731520" y="1645920"/>
+            <a:ext cx="5120640" cy="4480560"/>
           </a:xfrm>
           <a:prstGeom prst="rect">
             <a:avLst/>
@@ -5116,47 +4773,141 @@
       </p:pic>
       <p:sp>
         <p:nvSpPr>
-          <p:cNvPr id="8" name="TextBox 7"/>
-          <p:cNvSpPr txBox="1"/>
+          <p:cNvPr id="6" name="Rounded Rectangle 5"/>
+          <p:cNvSpPr/>
           <p:nvPr/>
         </p:nvSpPr>
         <p:spPr>
           <a:xfrm>
-            <a:off x="6400800" y="4480560"/>
-            <a:ext cx="4846320" cy="1371600"/>
-          </a:xfrm>
-          <a:prstGeom prst="rect">
+            <a:off x="6126480" y="1645920"/>
+            <a:ext cx="5303520" cy="4480560"/>
+          </a:xfrm>
+          <a:prstGeom prst="roundRect">
             <a:avLst/>
           </a:prstGeom>
-          <a:noFill/>
-        </p:spPr>
-        <p:txBody>
-          <a:bodyPr wrap="square">
-            <a:spAutoFit/>
-          </a:bodyPr>
-          <a:lstStyle/>
+          <a:solidFill>
+            <a:srgbClr val="121826"/>
+          </a:solidFill>
+          <a:ln>
+            <a:solidFill>
+              <a:srgbClr val="76B900"/>
+            </a:solidFill>
+          </a:ln>
+        </p:spPr>
+        <p:style>
+          <a:lnRef idx="1">
+            <a:schemeClr val="accent1"/>
+          </a:lnRef>
+          <a:fillRef idx="3">
+            <a:schemeClr val="accent1"/>
+          </a:fillRef>
+          <a:effectRef idx="2">
+            <a:schemeClr val="accent1"/>
+          </a:effectRef>
+          <a:fontRef idx="minor">
+            <a:schemeClr val="lt1"/>
+          </a:fontRef>
+        </p:style>
+        <p:txBody>
+          <a:bodyPr rtlCol="0" anchor="ctr" wrap="square"/>
+          <a:lstStyle/>
+          <a:p>
+            <a:pPr algn="ctr">
+              <a:defRPr sz="1300" b="1">
+                <a:solidFill>
+                  <a:srgbClr val="76B900"/>
+                </a:solidFill>
+              </a:defRPr>
+            </a:pPr>
+            <a:r>
+              <a:t>🎯 ГОЛОВНА МЕТА РОЗРОБКИ</a:t>
+            </a:r>
+          </a:p>
           <a:p>
             <a:pPr>
-              <a:defRPr b="1" sz="1300">
-                <a:solidFill>
-                  <a:srgbClr val="06B6D4"/>
-                </a:solidFill>
-              </a:defRPr>
-            </a:pPr>
-            <a:r>
-              <a:t>Ключова зміна парадигми:</a:t>
+              <a:defRPr sz="1800" b="1">
+                <a:solidFill>
+                  <a:srgbClr val="FFFFFF"/>
+                </a:solidFill>
+              </a:defRPr>
+            </a:pPr>
+            <a:r>
+              <a:t>Заміна математичного Path Tracing генеративним ШІ світла</a:t>
+            </a:r>
+          </a:p>
+          <a:p>
+            <a:br/>
+            <a:pPr>
+              <a:defRPr sz="1200" b="1">
+                <a:solidFill>
+                  <a:srgbClr val="22D3EE"/>
+                </a:solidFill>
+              </a:defRPr>
+            </a:pPr>
+            <a:r>
+              <a:t>✦ Подолання обчислювального бар'єру</a:t>
             </a:r>
           </a:p>
           <a:p>
             <a:pPr>
               <a:defRPr sz="1100">
                 <a:solidFill>
-                  <a:srgbClr val="9CA3AF"/>
-                </a:solidFill>
-              </a:defRPr>
-            </a:pPr>
-            <a:r>
-              <a:t>Раніше ШІ допомагав рендерити швидше (апскейл). У DLSS 5 нейромережа безпосередньо створює світло, матеріали та атмосферу сцени.</a:t>
+                  <a:srgbClr val="D1D5DB"/>
+                </a:solidFill>
+              </a:defRPr>
+            </a:pPr>
+            <a:r>
+              <a:t>Чесне трасування мільярдів променів світла фізично неможливе в 4K при 60 FPS навіть на найкращому залізі.</a:t>
+            </a:r>
+          </a:p>
+          <a:p>
+            <a:br/>
+            <a:pPr>
+              <a:defRPr sz="1200" b="1">
+                <a:solidFill>
+                  <a:srgbClr val="22D3EE"/>
+                </a:solidFill>
+              </a:defRPr>
+            </a:pPr>
+            <a:r>
+              <a:t>✦ Від математики до інтелекту</a:t>
+            </a:r>
+          </a:p>
+          <a:p>
+            <a:pPr>
+              <a:defRPr sz="1100">
+                <a:solidFill>
+                  <a:srgbClr val="D1D5DB"/>
+                </a:solidFill>
+              </a:defRPr>
+            </a:pPr>
+            <a:r>
+              <a:t>Замість прорахунку траєкторії кожного фотона, нейромережа генерує фотореалістичний стан світла на основі навчених фізичних патернів.</a:t>
+            </a:r>
+          </a:p>
+          <a:p>
+            <a:br/>
+            <a:pPr>
+              <a:defRPr sz="1200" b="1">
+                <a:solidFill>
+                  <a:srgbClr val="22D3EE"/>
+                </a:solidFill>
+              </a:defRPr>
+            </a:pPr>
+            <a:r>
+              <a:t>✦ Збереження інтерактивності</a:t>
+            </a:r>
+          </a:p>
+          <a:p>
+            <a:pPr>
+              <a:defRPr sz="1100">
+                <a:solidFill>
+                  <a:srgbClr val="D1D5DB"/>
+                </a:solidFill>
+              </a:defRPr>
+            </a:pPr>
+            <a:r>
+              <a:t>Досягти кінематографічного рівня фільмів Pixar у реальному часі без затримок відгуку.</a:t>
             </a:r>
           </a:p>
         </p:txBody>
@@ -5194,7 +4945,7 @@
             <a:avLst/>
           </a:prstGeom>
           <a:solidFill>
-            <a:srgbClr val="0B0F17"/>
+            <a:srgbClr val="0A0D14"/>
           </a:solidFill>
           <a:ln>
             <a:noFill/>
@@ -5224,96 +4975,24 @@
       </p:sp>
       <p:sp>
         <p:nvSpPr>
-          <p:cNvPr id="3" name="TextBox 2"/>
-          <p:cNvSpPr txBox="1"/>
-          <p:nvPr/>
-        </p:nvSpPr>
-        <p:spPr>
-          <a:xfrm>
-            <a:off x="731520" y="365760"/>
-            <a:ext cx="7315200" cy="365760"/>
-          </a:xfrm>
-          <a:prstGeom prst="rect">
-            <a:avLst/>
-          </a:prstGeom>
-          <a:noFill/>
-        </p:spPr>
-        <p:txBody>
-          <a:bodyPr wrap="square">
-            <a:spAutoFit/>
-          </a:bodyPr>
-          <a:lstStyle/>
-          <a:p>
-            <a:pPr>
-              <a:defRPr sz="1000" b="1">
-                <a:solidFill>
-                  <a:srgbClr val="76B900"/>
-                </a:solidFill>
-                <a:latin typeface="Arial"/>
-              </a:defRPr>
-            </a:pPr>
-            <a:r>
-              <a:t>●  РЕГЛАМЕНТ: ПУНКТ 2   |   СЛАЙД 04 / 12</a:t>
-            </a:r>
-          </a:p>
-        </p:txBody>
-      </p:sp>
-      <p:sp>
-        <p:nvSpPr>
-          <p:cNvPr id="4" name="TextBox 3"/>
-          <p:cNvSpPr txBox="1"/>
-          <p:nvPr/>
-        </p:nvSpPr>
-        <p:spPr>
-          <a:xfrm>
-            <a:off x="731520" y="640080"/>
-            <a:ext cx="10515600" cy="731520"/>
-          </a:xfrm>
-          <a:prstGeom prst="rect">
-            <a:avLst/>
-          </a:prstGeom>
-          <a:noFill/>
-        </p:spPr>
-        <p:txBody>
-          <a:bodyPr wrap="square">
-            <a:spAutoFit/>
-          </a:bodyPr>
-          <a:lstStyle/>
-          <a:p>
-            <a:pPr>
-              <a:defRPr sz="2400" b="1">
-                <a:solidFill>
-                  <a:srgbClr val="FFFFFF"/>
-                </a:solidFill>
-                <a:latin typeface="Arial"/>
-              </a:defRPr>
-            </a:pPr>
-            <a:r>
-              <a:t>2. Актуальність розробки: чому це потрібно саме зараз</a:t>
-            </a:r>
-          </a:p>
-        </p:txBody>
-      </p:sp>
-      <p:sp>
-        <p:nvSpPr>
-          <p:cNvPr id="5" name="Rounded Rectangle 4"/>
+          <p:cNvPr id="3" name="Rounded Rectangle 2"/>
           <p:cNvSpPr/>
           <p:nvPr/>
         </p:nvSpPr>
         <p:spPr>
           <a:xfrm>
-            <a:off x="731520" y="1645920"/>
-            <a:ext cx="10698480" cy="1280160"/>
+            <a:off x="731520" y="365760"/>
+            <a:ext cx="4114800" cy="329184"/>
           </a:xfrm>
           <a:prstGeom prst="roundRect">
             <a:avLst/>
           </a:prstGeom>
           <a:solidFill>
-            <a:srgbClr val="161E31"/>
+            <a:srgbClr val="14240C"/>
           </a:solidFill>
           <a:ln>
             <a:solidFill>
-              <a:srgbClr val="283750"/>
+              <a:srgbClr val="76B900"/>
             </a:solidFill>
           </a:ln>
         </p:spPr>
@@ -5332,54 +5011,79 @@
           </a:fontRef>
         </p:style>
         <p:txBody>
-          <a:bodyPr rtlCol="0" anchor="ctr" wrap="square"/>
+          <a:bodyPr rtlCol="0" anchor="ctr"/>
           <a:lstStyle/>
           <a:p>
             <a:pPr algn="ctr">
-              <a:defRPr b="1" sz="1400">
+              <a:defRPr sz="950" b="1">
                 <a:solidFill>
                   <a:srgbClr val="76B900"/>
                 </a:solidFill>
-              </a:defRPr>
-            </a:pPr>
-            <a:r>
-              <a:t>Проблема 1: Виклик 16,7 мілісекунди</a:t>
-            </a:r>
-          </a:p>
+                <a:latin typeface="Arial"/>
+              </a:defRPr>
+            </a:pPr>
+            <a:r>
+              <a:t>●  РЕГЛАМЕНТ: ПУНКТ 2   |   СЛАЙД 04 / 12</a:t>
+            </a:r>
+          </a:p>
+        </p:txBody>
+      </p:sp>
+      <p:sp>
+        <p:nvSpPr>
+          <p:cNvPr id="4" name="TextBox 3"/>
+          <p:cNvSpPr txBox="1"/>
+          <p:nvPr/>
+        </p:nvSpPr>
+        <p:spPr>
+          <a:xfrm>
+            <a:off x="731520" y="685800"/>
+            <a:ext cx="10698480" cy="685800"/>
+          </a:xfrm>
+          <a:prstGeom prst="rect">
+            <a:avLst/>
+          </a:prstGeom>
+          <a:noFill/>
+        </p:spPr>
+        <p:txBody>
+          <a:bodyPr wrap="square">
+            <a:spAutoFit/>
+          </a:bodyPr>
+          <a:lstStyle/>
           <a:p>
             <a:pPr>
-              <a:defRPr sz="1200">
+              <a:defRPr sz="2200" b="1">
                 <a:solidFill>
                   <a:srgbClr val="FFFFFF"/>
                 </a:solidFill>
-              </a:defRPr>
-            </a:pPr>
-            <a:r>
-              <a:t>Для плавності 60 FPS на повний кадр є менше ніж 17 мс. У нативному 4K це понад 8 мільйонів пікселів — кремній не встигає.</a:t>
-            </a:r>
-          </a:p>
-        </p:txBody>
-      </p:sp>
-      <p:sp>
-        <p:nvSpPr>
-          <p:cNvPr id="6" name="Rounded Rectangle 5"/>
+                <a:latin typeface="Arial"/>
+              </a:defRPr>
+            </a:pPr>
+            <a:r>
+              <a:t>2. Актуальність розробки: виклики сучасного рендерингу</a:t>
+            </a:r>
+          </a:p>
+        </p:txBody>
+      </p:sp>
+      <p:sp>
+        <p:nvSpPr>
+          <p:cNvPr id="5" name="Rounded Rectangle 4"/>
           <p:cNvSpPr/>
           <p:nvPr/>
         </p:nvSpPr>
         <p:spPr>
           <a:xfrm>
-            <a:off x="731520" y="3154680"/>
-            <a:ext cx="10698480" cy="1280160"/>
+            <a:off x="731520" y="1645920"/>
+            <a:ext cx="3474720" cy="4480560"/>
           </a:xfrm>
           <a:prstGeom prst="roundRect">
             <a:avLst/>
           </a:prstGeom>
           <a:solidFill>
-            <a:srgbClr val="161E31"/>
+            <a:srgbClr val="121826"/>
           </a:solidFill>
           <a:ln>
             <a:solidFill>
-              <a:srgbClr val="283750"/>
+              <a:srgbClr val="76B900"/>
             </a:solidFill>
           </a:ln>
         </p:spPr>
@@ -5402,50 +5106,63 @@
           <a:lstStyle/>
           <a:p>
             <a:pPr algn="ctr">
-              <a:defRPr b="1" sz="1400">
-                <a:solidFill>
-                  <a:srgbClr val="F59E0B"/>
-                </a:solidFill>
-              </a:defRPr>
-            </a:pPr>
-            <a:r>
-              <a:t>Проблема 2: Глухий кут «грубої сили»</a:t>
+              <a:defRPr sz="1500" b="1">
+                <a:solidFill>
+                  <a:srgbClr val="FFFFFF"/>
+                </a:solidFill>
+              </a:defRPr>
+            </a:pPr>
+            <a:r>
+              <a:t>⏱️ Виклик 16,7 мілісекунди</a:t>
             </a:r>
           </a:p>
           <a:p>
             <a:pPr>
-              <a:defRPr sz="1200">
-                <a:solidFill>
-                  <a:srgbClr val="FFFFFF"/>
-                </a:solidFill>
-              </a:defRPr>
-            </a:pPr>
-            <a:r>
-              <a:t>Закон Мура сповільнився. Збільшення кількості транзисторів призводить до шаленого енергоспоживання (до 500-600 Вт).</a:t>
-            </a:r>
-          </a:p>
-        </p:txBody>
-      </p:sp>
-      <p:sp>
-        <p:nvSpPr>
-          <p:cNvPr id="7" name="Rounded Rectangle 6"/>
+              <a:defRPr sz="1100" b="1">
+                <a:solidFill>
+                  <a:srgbClr val="76B900"/>
+                </a:solidFill>
+              </a:defRPr>
+            </a:pPr>
+            <a:r>
+              <a:t>Часовий ліміт для 60 FPS</a:t>
+            </a:r>
+          </a:p>
+          <a:p>
+            <a:br/>
+            <a:pPr>
+              <a:defRPr sz="1150">
+                <a:solidFill>
+                  <a:srgbClr val="D1D5DB"/>
+                </a:solidFill>
+              </a:defRPr>
+            </a:pPr>
+            <a:r>
+              <a:t>Для плавності в 60 FPS на повний конвеєр є 16,7 мс. У нативному 4K потрібно щомиті рахувати 8,3 мільйона пікселів. Відеокарта задихається без ШІ.</a:t>
+            </a:r>
+          </a:p>
+        </p:txBody>
+      </p:sp>
+      <p:sp>
+        <p:nvSpPr>
+          <p:cNvPr id="6" name="Rounded Rectangle 5"/>
           <p:cNvSpPr/>
           <p:nvPr/>
         </p:nvSpPr>
         <p:spPr>
           <a:xfrm>
-            <a:off x="731520" y="4663440"/>
-            <a:ext cx="10698480" cy="1280160"/>
+            <a:off x="4343400" y="1645920"/>
+            <a:ext cx="3474720" cy="4480560"/>
           </a:xfrm>
           <a:prstGeom prst="roundRect">
             <a:avLst/>
           </a:prstGeom>
           <a:solidFill>
-            <a:srgbClr val="161E31"/>
+            <a:srgbClr val="121826"/>
           </a:solidFill>
           <a:ln>
             <a:solidFill>
-              <a:srgbClr val="283750"/>
+              <a:srgbClr val="FBBF24"/>
             </a:solidFill>
           </a:ln>
         </p:spPr>
@@ -5468,26 +5185,118 @@
           <a:lstStyle/>
           <a:p>
             <a:pPr algn="ctr">
-              <a:defRPr b="1" sz="1400">
-                <a:solidFill>
-                  <a:srgbClr val="06B6D4"/>
-                </a:solidFill>
-              </a:defRPr>
-            </a:pPr>
-            <a:r>
-              <a:t>Проблема 3: Ефект «воскової шкіри»</a:t>
+              <a:defRPr sz="1500" b="1">
+                <a:solidFill>
+                  <a:srgbClr val="FFFFFF"/>
+                </a:solidFill>
+              </a:defRPr>
+            </a:pPr>
+            <a:r>
+              <a:t>⚡ Глухий кут кремнію</a:t>
             </a:r>
           </a:p>
           <a:p>
             <a:pPr>
-              <a:defRPr sz="1200">
+              <a:defRPr sz="1100" b="1">
+                <a:solidFill>
+                  <a:srgbClr val="76B900"/>
+                </a:solidFill>
+              </a:defRPr>
+            </a:pPr>
+            <a:r>
+              <a:t>Сповільнення закону Мура</a:t>
+            </a:r>
+          </a:p>
+          <a:p>
+            <a:br/>
+            <a:pPr>
+              <a:defRPr sz="1150">
+                <a:solidFill>
+                  <a:srgbClr val="D1D5DB"/>
+                </a:solidFill>
+              </a:defRPr>
+            </a:pPr>
+            <a:r>
+              <a:t>Неможливо безкінечно збільшувати кількість транзисторів: сучасні флагмани вже споживають по 500-600 Вт і виділяють шалене тепло. Потрібен архітектурний стрибок.</a:t>
+            </a:r>
+          </a:p>
+        </p:txBody>
+      </p:sp>
+      <p:sp>
+        <p:nvSpPr>
+          <p:cNvPr id="7" name="Rounded Rectangle 6"/>
+          <p:cNvSpPr/>
+          <p:nvPr/>
+        </p:nvSpPr>
+        <p:spPr>
+          <a:xfrm>
+            <a:off x="7955280" y="1645920"/>
+            <a:ext cx="3474720" cy="4480560"/>
+          </a:xfrm>
+          <a:prstGeom prst="roundRect">
+            <a:avLst/>
+          </a:prstGeom>
+          <a:solidFill>
+            <a:srgbClr val="121826"/>
+          </a:solidFill>
+          <a:ln>
+            <a:solidFill>
+              <a:srgbClr val="22D3EE"/>
+            </a:solidFill>
+          </a:ln>
+        </p:spPr>
+        <p:style>
+          <a:lnRef idx="1">
+            <a:schemeClr val="accent1"/>
+          </a:lnRef>
+          <a:fillRef idx="3">
+            <a:schemeClr val="accent1"/>
+          </a:fillRef>
+          <a:effectRef idx="2">
+            <a:schemeClr val="accent1"/>
+          </a:effectRef>
+          <a:fontRef idx="minor">
+            <a:schemeClr val="lt1"/>
+          </a:fontRef>
+        </p:style>
+        <p:txBody>
+          <a:bodyPr rtlCol="0" anchor="ctr" wrap="square"/>
+          <a:lstStyle/>
+          <a:p>
+            <a:pPr algn="ctr">
+              <a:defRPr sz="1500" b="1">
                 <a:solidFill>
                   <a:srgbClr val="FFFFFF"/>
                 </a:solidFill>
               </a:defRPr>
             </a:pPr>
             <a:r>
-              <a:t>Класичні шейдери не можуть правдоподібно передати проникнення світла крізь шкіру та волосся без катастрофічного падіння FPS.</a:t>
+              <a:t>🎭 Проблема «воскової шкіри»</a:t>
+            </a:r>
+          </a:p>
+          <a:p>
+            <a:pPr>
+              <a:defRPr sz="1100" b="1">
+                <a:solidFill>
+                  <a:srgbClr val="76B900"/>
+                </a:solidFill>
+              </a:defRPr>
+            </a:pPr>
+            <a:r>
+              <a:t>Межі класичних шейдерів</a:t>
+            </a:r>
+          </a:p>
+          <a:p>
+            <a:br/>
+            <a:pPr>
+              <a:defRPr sz="1150">
+                <a:solidFill>
+                  <a:srgbClr val="D1D5DB"/>
+                </a:solidFill>
+              </a:defRPr>
+            </a:pPr>
+            <a:r>
+              <a:t>Звичайні растеризатори не вміють реалістично симулювати проникнення світла під шкіру людини. Персонажі виглядали як пластикові манекени без життя.</a:t>
             </a:r>
           </a:p>
         </p:txBody>
@@ -5525,7 +5334,7 @@
             <a:avLst/>
           </a:prstGeom>
           <a:solidFill>
-            <a:srgbClr val="0B0F17"/>
+            <a:srgbClr val="0A0D14"/>
           </a:solidFill>
           <a:ln>
             <a:noFill/>
@@ -5555,14 +5364,69 @@
       </p:sp>
       <p:sp>
         <p:nvSpPr>
-          <p:cNvPr id="3" name="TextBox 2"/>
+          <p:cNvPr id="3" name="Rounded Rectangle 2"/>
+          <p:cNvSpPr/>
+          <p:nvPr/>
+        </p:nvSpPr>
+        <p:spPr>
+          <a:xfrm>
+            <a:off x="731520" y="365760"/>
+            <a:ext cx="4114800" cy="329184"/>
+          </a:xfrm>
+          <a:prstGeom prst="roundRect">
+            <a:avLst/>
+          </a:prstGeom>
+          <a:solidFill>
+            <a:srgbClr val="14240C"/>
+          </a:solidFill>
+          <a:ln>
+            <a:solidFill>
+              <a:srgbClr val="76B900"/>
+            </a:solidFill>
+          </a:ln>
+        </p:spPr>
+        <p:style>
+          <a:lnRef idx="1">
+            <a:schemeClr val="accent1"/>
+          </a:lnRef>
+          <a:fillRef idx="3">
+            <a:schemeClr val="accent1"/>
+          </a:fillRef>
+          <a:effectRef idx="2">
+            <a:schemeClr val="accent1"/>
+          </a:effectRef>
+          <a:fontRef idx="minor">
+            <a:schemeClr val="lt1"/>
+          </a:fontRef>
+        </p:style>
+        <p:txBody>
+          <a:bodyPr rtlCol="0" anchor="ctr"/>
+          <a:lstStyle/>
+          <a:p>
+            <a:pPr algn="ctr">
+              <a:defRPr sz="950" b="1">
+                <a:solidFill>
+                  <a:srgbClr val="76B900"/>
+                </a:solidFill>
+                <a:latin typeface="Arial"/>
+              </a:defRPr>
+            </a:pPr>
+            <a:r>
+              <a:t>●  АРХІТЕКТУРА ТЕХНОЛОГІЇ   |   СЛАЙД 05 / 12</a:t>
+            </a:r>
+          </a:p>
+        </p:txBody>
+      </p:sp>
+      <p:sp>
+        <p:nvSpPr>
+          <p:cNvPr id="4" name="TextBox 3"/>
           <p:cNvSpPr txBox="1"/>
           <p:nvPr/>
         </p:nvSpPr>
         <p:spPr>
           <a:xfrm>
-            <a:off x="731520" y="365760"/>
-            <a:ext cx="7315200" cy="365760"/>
+            <a:off x="731520" y="685800"/>
+            <a:ext cx="10698480" cy="685800"/>
           </a:xfrm>
           <a:prstGeom prst="rect">
             <a:avLst/>
@@ -5576,58 +5440,22 @@
           <a:lstStyle/>
           <a:p>
             <a:pPr>
-              <a:defRPr sz="1000" b="1">
-                <a:solidFill>
-                  <a:srgbClr val="76B900"/>
+              <a:defRPr sz="2200" b="1">
+                <a:solidFill>
+                  <a:srgbClr val="FFFFFF"/>
                 </a:solidFill>
                 <a:latin typeface="Arial"/>
               </a:defRPr>
             </a:pPr>
             <a:r>
-              <a:t>●  АРХІТЕКТУРА ТЕХНОЛОГІЇ   |   СЛАЙД 05 / 12</a:t>
-            </a:r>
-          </a:p>
-        </p:txBody>
-      </p:sp>
-      <p:sp>
-        <p:nvSpPr>
-          <p:cNvPr id="4" name="TextBox 3"/>
-          <p:cNvSpPr txBox="1"/>
-          <p:nvPr/>
-        </p:nvSpPr>
-        <p:spPr>
-          <a:xfrm>
-            <a:off x="731520" y="640080"/>
-            <a:ext cx="10515600" cy="731520"/>
-          </a:xfrm>
-          <a:prstGeom prst="rect">
-            <a:avLst/>
-          </a:prstGeom>
-          <a:noFill/>
-        </p:spPr>
-        <p:txBody>
-          <a:bodyPr wrap="square">
-            <a:spAutoFit/>
-          </a:bodyPr>
-          <a:lstStyle/>
-          <a:p>
-            <a:pPr>
-              <a:defRPr sz="2400" b="1">
-                <a:solidFill>
-                  <a:srgbClr val="FFFFFF"/>
-                </a:solidFill>
-                <a:latin typeface="Arial"/>
-              </a:defRPr>
-            </a:pPr>
-            <a:r>
-              <a:t>Як працює 3D-Guided Neural Rendering під капотом</a:t>
+              <a:t>Конвеєр DLSS 5: 3D-буфери рушія та нейронний синтез світла</a:t>
             </a:r>
           </a:p>
         </p:txBody>
       </p:sp>
       <p:pic>
         <p:nvPicPr>
-          <p:cNvPr id="5" name="Picture 4" descr="dlss5_neural_skin.jpg"/>
+          <p:cNvPr id="5" name="Picture 4" descr="image-8-1.png"/>
           <p:cNvPicPr>
             <a:picLocks noChangeAspect="1"/>
           </p:cNvPicPr>
@@ -5642,7 +5470,7 @@
         <p:spPr>
           <a:xfrm>
             <a:off x="731520" y="1645920"/>
-            <a:ext cx="5029200" cy="4389120"/>
+            <a:ext cx="10698480" cy="2377440"/>
           </a:xfrm>
           <a:prstGeom prst="rect">
             <a:avLst/>
@@ -5657,18 +5485,18 @@
         </p:nvSpPr>
         <p:spPr>
           <a:xfrm>
-            <a:off x="6035040" y="1645920"/>
-            <a:ext cx="5394960" cy="4389120"/>
+            <a:off x="731520" y="4206240"/>
+            <a:ext cx="3474720" cy="2011680"/>
           </a:xfrm>
           <a:prstGeom prst="roundRect">
             <a:avLst/>
           </a:prstGeom>
           <a:solidFill>
-            <a:srgbClr val="161E31"/>
+            <a:srgbClr val="121826"/>
           </a:solidFill>
           <a:ln>
             <a:solidFill>
-              <a:srgbClr val="76B900"/>
+              <a:srgbClr val="222D44"/>
             </a:solidFill>
           </a:ln>
         </p:spPr>
@@ -5691,114 +5519,158 @@
           <a:lstStyle/>
           <a:p>
             <a:pPr algn="ctr">
-              <a:defRPr b="1" sz="1300">
+              <a:defRPr sz="1200" b="1">
                 <a:solidFill>
                   <a:srgbClr val="76B900"/>
                 </a:solidFill>
               </a:defRPr>
             </a:pPr>
             <a:r>
-              <a:t>КЛЮЧОВІ МЕХАНІЗМИ ТЕХНОЛОГІЇ</a:t>
-            </a:r>
-          </a:p>
-          <a:p>
-            <a:br/>
-            <a:pPr>
-              <a:defRPr b="1" sz="1200">
-                <a:solidFill>
-                  <a:srgbClr val="FFFFFF"/>
-                </a:solidFill>
-              </a:defRPr>
-            </a:pPr>
-            <a:r>
-              <a:t>✦ Семантичне розуміння сцени</a:t>
+              <a:t>1. 3D-контекст рушія</a:t>
             </a:r>
           </a:p>
           <a:p>
             <a:pPr>
               <a:defRPr sz="1050">
                 <a:solidFill>
-                  <a:srgbClr val="9CA3AF"/>
-                </a:solidFill>
-              </a:defRPr>
-            </a:pPr>
-            <a:r>
-              <a:t>Модель бачить не просто пікселі, а розпізнає матеріали: біологічну тканину (шкіру), шовк, метал, пасма волосся.</a:t>
-            </a:r>
-          </a:p>
-          <a:p>
-            <a:br/>
-            <a:pPr>
-              <a:defRPr b="1" sz="1200">
-                <a:solidFill>
-                  <a:srgbClr val="FFFFFF"/>
-                </a:solidFill>
-              </a:defRPr>
-            </a:pPr>
-            <a:r>
-              <a:t>✦ Підповерхневе розсіювання (Subsurface Scattering)</a:t>
+                  <a:srgbClr val="D1D5DB"/>
+                </a:solidFill>
+              </a:defRPr>
+            </a:pPr>
+            <a:r>
+              <a:t>Гра передає буфери глибини (Depth), нормалей поверхонь та вектори руху. ШІ знає просторове розташування кожного пікселя.</a:t>
+            </a:r>
+          </a:p>
+        </p:txBody>
+      </p:sp>
+      <p:sp>
+        <p:nvSpPr>
+          <p:cNvPr id="7" name="Rounded Rectangle 6"/>
+          <p:cNvSpPr/>
+          <p:nvPr/>
+        </p:nvSpPr>
+        <p:spPr>
+          <a:xfrm>
+            <a:off x="4343400" y="4206240"/>
+            <a:ext cx="3474720" cy="2011680"/>
+          </a:xfrm>
+          <a:prstGeom prst="roundRect">
+            <a:avLst/>
+          </a:prstGeom>
+          <a:solidFill>
+            <a:srgbClr val="121826"/>
+          </a:solidFill>
+          <a:ln>
+            <a:solidFill>
+              <a:srgbClr val="222D44"/>
+            </a:solidFill>
+          </a:ln>
+        </p:spPr>
+        <p:style>
+          <a:lnRef idx="1">
+            <a:schemeClr val="accent1"/>
+          </a:lnRef>
+          <a:fillRef idx="3">
+            <a:schemeClr val="accent1"/>
+          </a:fillRef>
+          <a:effectRef idx="2">
+            <a:schemeClr val="accent1"/>
+          </a:effectRef>
+          <a:fontRef idx="minor">
+            <a:schemeClr val="lt1"/>
+          </a:fontRef>
+        </p:style>
+        <p:txBody>
+          <a:bodyPr rtlCol="0" anchor="ctr" wrap="square"/>
+          <a:lstStyle/>
+          <a:p>
+            <a:pPr algn="ctr">
+              <a:defRPr sz="1200" b="1">
+                <a:solidFill>
+                  <a:srgbClr val="76B900"/>
+                </a:solidFill>
+              </a:defRPr>
+            </a:pPr>
+            <a:r>
+              <a:t>2. Семантична сегментація</a:t>
             </a:r>
           </a:p>
           <a:p>
             <a:pPr>
               <a:defRPr sz="1050">
                 <a:solidFill>
-                  <a:srgbClr val="9CA3AF"/>
-                </a:solidFill>
-              </a:defRPr>
-            </a:pPr>
-            <a:r>
-              <a:t>Імітація проходження світла під шкіру — зникає ефект пластикового мерця, з'являються живі пори та капілярний тон.</a:t>
-            </a:r>
-          </a:p>
-          <a:p>
-            <a:br/>
-            <a:pPr>
-              <a:defRPr b="1" sz="1200">
-                <a:solidFill>
-                  <a:srgbClr val="FFFFFF"/>
-                </a:solidFill>
-              </a:defRPr>
-            </a:pPr>
-            <a:r>
-              <a:t>✦ Збереження 3D-геометрії</a:t>
+                  <a:srgbClr val="D1D5DB"/>
+                </a:solidFill>
+              </a:defRPr>
+            </a:pPr>
+            <a:r>
+              <a:t>Модель розпізнає матеріали: біологічні тканини (шкіру), тканину одягу, скло, волосся та тип джерела світла.</a:t>
+            </a:r>
+          </a:p>
+        </p:txBody>
+      </p:sp>
+      <p:sp>
+        <p:nvSpPr>
+          <p:cNvPr id="8" name="Rounded Rectangle 7"/>
+          <p:cNvSpPr/>
+          <p:nvPr/>
+        </p:nvSpPr>
+        <p:spPr>
+          <a:xfrm>
+            <a:off x="7955280" y="4206240"/>
+            <a:ext cx="3474720" cy="2011680"/>
+          </a:xfrm>
+          <a:prstGeom prst="roundRect">
+            <a:avLst/>
+          </a:prstGeom>
+          <a:solidFill>
+            <a:srgbClr val="121826"/>
+          </a:solidFill>
+          <a:ln>
+            <a:solidFill>
+              <a:srgbClr val="222D44"/>
+            </a:solidFill>
+          </a:ln>
+        </p:spPr>
+        <p:style>
+          <a:lnRef idx="1">
+            <a:schemeClr val="accent1"/>
+          </a:lnRef>
+          <a:fillRef idx="3">
+            <a:schemeClr val="accent1"/>
+          </a:fillRef>
+          <a:effectRef idx="2">
+            <a:schemeClr val="accent1"/>
+          </a:effectRef>
+          <a:fontRef idx="minor">
+            <a:schemeClr val="lt1"/>
+          </a:fontRef>
+        </p:style>
+        <p:txBody>
+          <a:bodyPr rtlCol="0" anchor="ctr" wrap="square"/>
+          <a:lstStyle/>
+          <a:p>
+            <a:pPr algn="ctr">
+              <a:defRPr sz="1200" b="1">
+                <a:solidFill>
+                  <a:srgbClr val="76B900"/>
+                </a:solidFill>
+              </a:defRPr>
+            </a:pPr>
+            <a:r>
+              <a:t>3. Творчий контроль</a:t>
             </a:r>
           </a:p>
           <a:p>
             <a:pPr>
               <a:defRPr sz="1050">
                 <a:solidFill>
-                  <a:srgbClr val="9CA3AF"/>
-                </a:solidFill>
-              </a:defRPr>
-            </a:pPr>
-            <a:r>
-              <a:t>ШІ не змінює форму персонажа. Геометрія і текстури контролюються рушієм гри, а нейромережа відповідає суто за світло.</a:t>
-            </a:r>
-          </a:p>
-          <a:p>
-            <a:br/>
-            <a:pPr>
-              <a:defRPr b="1" sz="1200">
-                <a:solidFill>
-                  <a:srgbClr val="FFFFFF"/>
-                </a:solidFill>
-              </a:defRPr>
-            </a:pPr>
-            <a:r>
-              <a:t>✦ Повний контроль розробника</a:t>
-            </a:r>
-          </a:p>
-          <a:p>
-            <a:pPr>
-              <a:defRPr sz="1050">
-                <a:solidFill>
-                  <a:srgbClr val="9CA3AF"/>
-                </a:solidFill>
-              </a:defRPr>
-            </a:pPr>
-            <a:r>
-              <a:t>Художники мають маски та колірні коефіцієнти, щоб режисерське бачення гри не спотворювалося.</a:t>
+                  <a:srgbClr val="D1D5DB"/>
+                </a:solidFill>
+              </a:defRPr>
+            </a:pPr>
+            <a:r>
+              <a:t>Розробники керують параметрами Structure, Tone Intensity та масками, зберігаючи задум режисера.</a:t>
             </a:r>
           </a:p>
         </p:txBody>
@@ -5836,7 +5708,7 @@
             <a:avLst/>
           </a:prstGeom>
           <a:solidFill>
-            <a:srgbClr val="0B0F17"/>
+            <a:srgbClr val="0A0D14"/>
           </a:solidFill>
           <a:ln>
             <a:noFill/>
@@ -5866,146 +5738,20 @@
       </p:sp>
       <p:sp>
         <p:nvSpPr>
-          <p:cNvPr id="3" name="TextBox 2"/>
-          <p:cNvSpPr txBox="1"/>
-          <p:nvPr/>
-        </p:nvSpPr>
-        <p:spPr>
-          <a:xfrm>
-            <a:off x="731520" y="365760"/>
-            <a:ext cx="7315200" cy="365760"/>
-          </a:xfrm>
-          <a:prstGeom prst="rect">
-            <a:avLst/>
-          </a:prstGeom>
-          <a:noFill/>
-        </p:spPr>
-        <p:txBody>
-          <a:bodyPr wrap="square">
-            <a:spAutoFit/>
-          </a:bodyPr>
-          <a:lstStyle/>
-          <a:p>
-            <a:pPr>
-              <a:defRPr sz="1000" b="1">
-                <a:solidFill>
-                  <a:srgbClr val="76B900"/>
-                </a:solidFill>
-                <a:latin typeface="Arial"/>
-              </a:defRPr>
-            </a:pPr>
-            <a:r>
-              <a:t>●  ЖОВТНЕВИЙ ПРОРИВ 2026   |   СЛАЙД 06 / 12</a:t>
-            </a:r>
-          </a:p>
-        </p:txBody>
-      </p:sp>
-      <p:sp>
-        <p:nvSpPr>
-          <p:cNvPr id="4" name="TextBox 3"/>
-          <p:cNvSpPr txBox="1"/>
-          <p:nvPr/>
-        </p:nvSpPr>
-        <p:spPr>
-          <a:xfrm>
-            <a:off x="731520" y="640080"/>
-            <a:ext cx="10515600" cy="731520"/>
-          </a:xfrm>
-          <a:prstGeom prst="rect">
-            <a:avLst/>
-          </a:prstGeom>
-          <a:noFill/>
-        </p:spPr>
-        <p:txBody>
-          <a:bodyPr wrap="square">
-            <a:spAutoFit/>
-          </a:bodyPr>
-          <a:lstStyle/>
-          <a:p>
-            <a:pPr>
-              <a:defRPr sz="2400" b="1">
-                <a:solidFill>
-                  <a:srgbClr val="FFFFFF"/>
-                </a:solidFill>
-                <a:latin typeface="Arial"/>
-              </a:defRPr>
-            </a:pPr>
-            <a:r>
-              <a:t>Оновлення від 16 жовтня 2026: подолання кризи продуктивності</a:t>
-            </a:r>
-          </a:p>
-        </p:txBody>
-      </p:sp>
-      <p:sp>
-        <p:nvSpPr>
-          <p:cNvPr id="5" name="Rounded Rectangle 4"/>
+          <p:cNvPr id="3" name="Rounded Rectangle 2"/>
           <p:cNvSpPr/>
           <p:nvPr/>
         </p:nvSpPr>
         <p:spPr>
           <a:xfrm>
-            <a:off x="731520" y="1645920"/>
-            <a:ext cx="10698480" cy="1005840"/>
+            <a:off x="731520" y="365760"/>
+            <a:ext cx="4114800" cy="329184"/>
           </a:xfrm>
           <a:prstGeom prst="roundRect">
             <a:avLst/>
           </a:prstGeom>
           <a:solidFill>
-            <a:srgbClr val="1E140A"/>
-          </a:solidFill>
-          <a:ln>
-            <a:solidFill>
-              <a:srgbClr val="F59E0B"/>
-            </a:solidFill>
-          </a:ln>
-        </p:spPr>
-        <p:style>
-          <a:lnRef idx="1">
-            <a:schemeClr val="accent1"/>
-          </a:lnRef>
-          <a:fillRef idx="3">
-            <a:schemeClr val="accent1"/>
-          </a:fillRef>
-          <a:effectRef idx="2">
-            <a:schemeClr val="accent1"/>
-          </a:effectRef>
-          <a:fontRef idx="minor">
-            <a:schemeClr val="lt1"/>
-          </a:fontRef>
-        </p:style>
-        <p:txBody>
-          <a:bodyPr rtlCol="0" anchor="ctr" wrap="square"/>
-          <a:lstStyle/>
-          <a:p>
-            <a:pPr algn="ctr">
-              <a:defRPr b="1" sz="1300">
-                <a:solidFill>
-                  <a:srgbClr val="F59E0B"/>
-                </a:solidFill>
-              </a:defRPr>
-            </a:pPr>
-            <a:r>
-              <a:t>⚠️ Початкова проблема: DLSS 5 на першому релізі знижував FPS на 50–60% через складність моделі.</a:t>
-            </a:r>
-          </a:p>
-        </p:txBody>
-      </p:sp>
-      <p:sp>
-        <p:nvSpPr>
-          <p:cNvPr id="6" name="Rounded Rectangle 5"/>
-          <p:cNvSpPr/>
-          <p:nvPr/>
-        </p:nvSpPr>
-        <p:spPr>
-          <a:xfrm>
-            <a:off x="731520" y="2926080"/>
-            <a:ext cx="2560320" cy="3200400"/>
-          </a:xfrm>
-          <a:prstGeom prst="roundRect">
-            <a:avLst/>
-          </a:prstGeom>
-          <a:solidFill>
-            <a:srgbClr val="161E31"/>
+            <a:srgbClr val="14240C"/>
           </a:solidFill>
           <a:ln>
             <a:solidFill>
@@ -6028,63 +5774,99 @@
           </a:fontRef>
         </p:style>
         <p:txBody>
-          <a:bodyPr rtlCol="0" anchor="ctr" wrap="square"/>
+          <a:bodyPr rtlCol="0" anchor="ctr"/>
           <a:lstStyle/>
           <a:p>
             <a:pPr algn="ctr">
-              <a:defRPr b="1" sz="2000">
+              <a:defRPr sz="950" b="1">
                 <a:solidFill>
                   <a:srgbClr val="76B900"/>
                 </a:solidFill>
-              </a:defRPr>
-            </a:pPr>
-            <a:r>
-              <a:t>У 2 рази швидша</a:t>
-            </a:r>
-          </a:p>
+                <a:latin typeface="Arial"/>
+              </a:defRPr>
+            </a:pPr>
+            <a:r>
+              <a:t>●  ВІЗУАЛЬНЕ ПОРІВНЯННЯ   |   СЛАЙД 06 / 12</a:t>
+            </a:r>
+          </a:p>
+        </p:txBody>
+      </p:sp>
+      <p:sp>
+        <p:nvSpPr>
+          <p:cNvPr id="4" name="TextBox 3"/>
+          <p:cNvSpPr txBox="1"/>
+          <p:nvPr/>
+        </p:nvSpPr>
+        <p:spPr>
+          <a:xfrm>
+            <a:off x="731520" y="685800"/>
+            <a:ext cx="10698480" cy="685800"/>
+          </a:xfrm>
+          <a:prstGeom prst="rect">
+            <a:avLst/>
+          </a:prstGeom>
+          <a:noFill/>
+        </p:spPr>
+        <p:txBody>
+          <a:bodyPr wrap="square">
+            <a:spAutoFit/>
+          </a:bodyPr>
+          <a:lstStyle/>
           <a:p>
             <a:pPr>
-              <a:defRPr b="1" sz="1200">
+              <a:defRPr sz="2200" b="1">
                 <a:solidFill>
                   <a:srgbClr val="FFFFFF"/>
                 </a:solidFill>
-              </a:defRPr>
-            </a:pPr>
-            <a:r>
-              <a:t>Швидкість моделі</a:t>
-            </a:r>
-          </a:p>
-          <a:p>
-            <a:br/>
-            <a:pPr>
-              <a:defRPr sz="1050">
-                <a:solidFill>
-                  <a:srgbClr val="9CA3AF"/>
-                </a:solidFill>
-              </a:defRPr>
-            </a:pPr>
-            <a:r>
-              <a:t>Оптимізація архітектури нейромережі подвоїла швидкість генерації світла.</a:t>
-            </a:r>
-          </a:p>
-        </p:txBody>
-      </p:sp>
-      <p:sp>
-        <p:nvSpPr>
-          <p:cNvPr id="7" name="Rounded Rectangle 6"/>
+                <a:latin typeface="Arial"/>
+              </a:defRPr>
+            </a:pPr>
+            <a:r>
+              <a:t>Subsurface Scattering: як DLSS 5 оживляє персонажів</a:t>
+            </a:r>
+          </a:p>
+        </p:txBody>
+      </p:sp>
+      <p:pic>
+        <p:nvPicPr>
+          <p:cNvPr id="5" name="Picture 4" descr="dlss5_neural_skin.jpg"/>
+          <p:cNvPicPr>
+            <a:picLocks noChangeAspect="1"/>
+          </p:cNvPicPr>
+          <p:nvPr/>
+        </p:nvPicPr>
+        <p:blipFill>
+          <a:blip r:embed="rId2"/>
+          <a:stretch>
+            <a:fillRect/>
+          </a:stretch>
+        </p:blipFill>
+        <p:spPr>
+          <a:xfrm>
+            <a:off x="731520" y="1645920"/>
+            <a:ext cx="5943600" cy="4480560"/>
+          </a:xfrm>
+          <a:prstGeom prst="rect">
+            <a:avLst/>
+          </a:prstGeom>
+        </p:spPr>
+      </p:pic>
+      <p:sp>
+        <p:nvSpPr>
+          <p:cNvPr id="6" name="Rounded Rectangle 5"/>
           <p:cNvSpPr/>
           <p:nvPr/>
         </p:nvSpPr>
         <p:spPr>
           <a:xfrm>
-            <a:off x="3429000" y="2926080"/>
-            <a:ext cx="2560320" cy="3200400"/>
+            <a:off x="6949440" y="1645920"/>
+            <a:ext cx="4480560" cy="4480560"/>
           </a:xfrm>
           <a:prstGeom prst="roundRect">
             <a:avLst/>
           </a:prstGeom>
           <a:solidFill>
-            <a:srgbClr val="161E31"/>
+            <a:srgbClr val="121826"/>
           </a:solidFill>
           <a:ln>
             <a:solidFill>
@@ -6111,197 +5893,114 @@
           <a:lstStyle/>
           <a:p>
             <a:pPr algn="ctr">
-              <a:defRPr b="1" sz="2000">
+              <a:defRPr sz="1300" b="1">
                 <a:solidFill>
                   <a:srgbClr val="76B900"/>
                 </a:solidFill>
               </a:defRPr>
             </a:pPr>
             <a:r>
-              <a:t>-24% розмір</a:t>
-            </a:r>
-          </a:p>
-          <a:p>
-            <a:pPr>
-              <a:defRPr b="1" sz="1200">
-                <a:solidFill>
-                  <a:srgbClr val="FFFFFF"/>
-                </a:solidFill>
-              </a:defRPr>
-            </a:pPr>
-            <a:r>
-              <a:t>Стиснення ваг</a:t>
+              <a:t>ЩО ЗМІНЮЄ НЕЙРОННЕ СВІТЛО:</a:t>
             </a:r>
           </a:p>
           <a:p>
             <a:br/>
             <a:pPr>
-              <a:defRPr sz="1050">
+              <a:defRPr sz="1150" b="1">
+                <a:solidFill>
+                  <a:srgbClr val="FFFFFF"/>
+                </a:solidFill>
+              </a:defRPr>
+            </a:pPr>
+            <a:r>
+              <a:t>✦ Жива шкіра (Subsurface Scattering)</a:t>
+            </a:r>
+          </a:p>
+          <a:p>
+            <a:pPr>
+              <a:defRPr sz="1000">
                 <a:solidFill>
                   <a:srgbClr val="9CA3AF"/>
                 </a:solidFill>
               </a:defRPr>
             </a:pPr>
             <a:r>
-              <a:t>Зменшено обсяг мережі без втрати візуальної точності.</a:t>
-            </a:r>
-          </a:p>
-        </p:txBody>
-      </p:sp>
-      <p:sp>
-        <p:nvSpPr>
-          <p:cNvPr id="8" name="Rounded Rectangle 7"/>
-          <p:cNvSpPr/>
-          <p:nvPr/>
-        </p:nvSpPr>
-        <p:spPr>
-          <a:xfrm>
-            <a:off x="6126480" y="2926080"/>
-            <a:ext cx="2560320" cy="3200400"/>
-          </a:xfrm>
-          <a:prstGeom prst="roundRect">
-            <a:avLst/>
-          </a:prstGeom>
-          <a:solidFill>
-            <a:srgbClr val="161E31"/>
-          </a:solidFill>
-          <a:ln>
-            <a:solidFill>
-              <a:srgbClr val="76B900"/>
-            </a:solidFill>
-          </a:ln>
-        </p:spPr>
-        <p:style>
-          <a:lnRef idx="1">
-            <a:schemeClr val="accent1"/>
-          </a:lnRef>
-          <a:fillRef idx="3">
-            <a:schemeClr val="accent1"/>
-          </a:fillRef>
-          <a:effectRef idx="2">
-            <a:schemeClr val="accent1"/>
-          </a:effectRef>
-          <a:fontRef idx="minor">
-            <a:schemeClr val="lt1"/>
-          </a:fontRef>
-        </p:style>
-        <p:txBody>
-          <a:bodyPr rtlCol="0" anchor="ctr" wrap="square"/>
-          <a:lstStyle/>
-          <a:p>
-            <a:pPr algn="ctr">
-              <a:defRPr b="1" sz="2000">
-                <a:solidFill>
-                  <a:srgbClr val="76B900"/>
-                </a:solidFill>
-              </a:defRPr>
-            </a:pPr>
-            <a:r>
-              <a:t>-20% VRAM</a:t>
-            </a:r>
-          </a:p>
-          <a:p>
-            <a:pPr>
-              <a:defRPr b="1" sz="1200">
-                <a:solidFill>
-                  <a:srgbClr val="FFFFFF"/>
-                </a:solidFill>
-              </a:defRPr>
-            </a:pPr>
-            <a:r>
-              <a:t>Відеопам'ять у 4K</a:t>
+              <a:t>Світло проникає крізь епідерміс і розсіюється зсередини. Обличчя втрачає восковий блиск, видно природний тон і мікротіні.</a:t>
             </a:r>
           </a:p>
           <a:p>
             <a:br/>
             <a:pPr>
-              <a:defRPr sz="1050">
+              <a:defRPr sz="1150" b="1">
+                <a:solidFill>
+                  <a:srgbClr val="FFFFFF"/>
+                </a:solidFill>
+              </a:defRPr>
+            </a:pPr>
+            <a:r>
+              <a:t>✦ Волосся та вії</a:t>
+            </a:r>
+          </a:p>
+          <a:p>
+            <a:pPr>
+              <a:defRPr sz="1000">
                 <a:solidFill>
                   <a:srgbClr val="9CA3AF"/>
                 </a:solidFill>
               </a:defRPr>
             </a:pPr>
             <a:r>
-              <a:t>Звільнено критичні гігабайти пам'яті для текстур ультра-високої роздільності.</a:t>
-            </a:r>
-          </a:p>
-        </p:txBody>
-      </p:sp>
-      <p:sp>
-        <p:nvSpPr>
-          <p:cNvPr id="9" name="Rounded Rectangle 8"/>
-          <p:cNvSpPr/>
-          <p:nvPr/>
-        </p:nvSpPr>
-        <p:spPr>
-          <a:xfrm>
-            <a:off x="8823960" y="2926080"/>
-            <a:ext cx="2560320" cy="3200400"/>
-          </a:xfrm>
-          <a:prstGeom prst="roundRect">
-            <a:avLst/>
-          </a:prstGeom>
-          <a:solidFill>
-            <a:srgbClr val="161E31"/>
-          </a:solidFill>
-          <a:ln>
-            <a:solidFill>
-              <a:srgbClr val="76B900"/>
-            </a:solidFill>
-          </a:ln>
-        </p:spPr>
-        <p:style>
-          <a:lnRef idx="1">
-            <a:schemeClr val="accent1"/>
-          </a:lnRef>
-          <a:fillRef idx="3">
-            <a:schemeClr val="accent1"/>
-          </a:fillRef>
-          <a:effectRef idx="2">
-            <a:schemeClr val="accent1"/>
-          </a:effectRef>
-          <a:fontRef idx="minor">
-            <a:schemeClr val="lt1"/>
-          </a:fontRef>
-        </p:style>
-        <p:txBody>
-          <a:bodyPr rtlCol="0" anchor="ctr" wrap="square"/>
-          <a:lstStyle/>
-          <a:p>
-            <a:pPr algn="ctr">
-              <a:defRPr b="1" sz="2000">
-                <a:solidFill>
-                  <a:srgbClr val="76B900"/>
-                </a:solidFill>
-              </a:defRPr>
-            </a:pPr>
-            <a:r>
-              <a:t>Preset C</a:t>
-            </a:r>
-          </a:p>
-          <a:p>
-            <a:pPr>
-              <a:defRPr b="1" sz="1200">
-                <a:solidFill>
-                  <a:srgbClr val="FFFFFF"/>
-                </a:solidFill>
-              </a:defRPr>
-            </a:pPr>
-            <a:r>
-              <a:t>Для RTX 5060</a:t>
+              <a:t>ШІ формує індивідуальні відблиски на окремих пасмах замість однорідної пласкої плашки шейдера.</a:t>
             </a:r>
           </a:p>
           <a:p>
             <a:br/>
             <a:pPr>
-              <a:defRPr sz="1050">
+              <a:defRPr sz="1150" b="1">
+                <a:solidFill>
+                  <a:srgbClr val="FFFFFF"/>
+                </a:solidFill>
+              </a:defRPr>
+            </a:pPr>
+            <a:r>
+              <a:t>✦ Тканини та шовк</a:t>
+            </a:r>
+          </a:p>
+          <a:p>
+            <a:pPr>
+              <a:defRPr sz="1000">
                 <a:solidFill>
                   <a:srgbClr val="9CA3AF"/>
                 </a:solidFill>
               </a:defRPr>
             </a:pPr>
             <a:r>
-              <a:t>Полегшений режим для народних карт: до +35% приросту швидкості обробки.</a:t>
+              <a:t>Фізично точний відблиск і матовість матеріалів одягу залежно від кута падіння променя.</a:t>
+            </a:r>
+          </a:p>
+          <a:p>
+            <a:br/>
+            <a:pPr>
+              <a:defRPr sz="1150" b="1">
+                <a:solidFill>
+                  <a:srgbClr val="FFFFFF"/>
+                </a:solidFill>
+              </a:defRPr>
+            </a:pPr>
+            <a:r>
+              <a:t>✦ Незмінна 3D-геометрія</a:t>
+            </a:r>
+          </a:p>
+          <a:p>
+            <a:pPr>
+              <a:defRPr sz="1000">
+                <a:solidFill>
+                  <a:srgbClr val="9CA3AF"/>
+                </a:solidFill>
+              </a:defRPr>
+            </a:pPr>
+            <a:r>
+              <a:t>Полігональна сітка моделі не змінюється ні на міліметр — перетворюється виключно світло.</a:t>
             </a:r>
           </a:p>
         </p:txBody>
@@ -6339,7 +6038,7 @@
             <a:avLst/>
           </a:prstGeom>
           <a:solidFill>
-            <a:srgbClr val="0B0F17"/>
+            <a:srgbClr val="0A0D14"/>
           </a:solidFill>
           <a:ln>
             <a:noFill/>
@@ -6369,96 +6068,24 @@
       </p:sp>
       <p:sp>
         <p:nvSpPr>
-          <p:cNvPr id="3" name="TextBox 2"/>
-          <p:cNvSpPr txBox="1"/>
-          <p:nvPr/>
-        </p:nvSpPr>
-        <p:spPr>
-          <a:xfrm>
-            <a:off x="731520" y="365760"/>
-            <a:ext cx="7315200" cy="365760"/>
-          </a:xfrm>
-          <a:prstGeom prst="rect">
-            <a:avLst/>
-          </a:prstGeom>
-          <a:noFill/>
-        </p:spPr>
-        <p:txBody>
-          <a:bodyPr wrap="square">
-            <a:spAutoFit/>
-          </a:bodyPr>
-          <a:lstStyle/>
-          <a:p>
-            <a:pPr>
-              <a:defRPr sz="1000" b="1">
-                <a:solidFill>
-                  <a:srgbClr val="76B900"/>
-                </a:solidFill>
-                <a:latin typeface="Arial"/>
-              </a:defRPr>
-            </a:pPr>
-            <a:r>
-              <a:t>●  РЕГЛАМЕНТ: ПУНКТ 3   |   СЛАЙД 07 / 12</a:t>
-            </a:r>
-          </a:p>
-        </p:txBody>
-      </p:sp>
-      <p:sp>
-        <p:nvSpPr>
-          <p:cNvPr id="4" name="TextBox 3"/>
-          <p:cNvSpPr txBox="1"/>
-          <p:nvPr/>
-        </p:nvSpPr>
-        <p:spPr>
-          <a:xfrm>
-            <a:off x="731520" y="640080"/>
-            <a:ext cx="10515600" cy="731520"/>
-          </a:xfrm>
-          <a:prstGeom prst="rect">
-            <a:avLst/>
-          </a:prstGeom>
-          <a:noFill/>
-        </p:spPr>
-        <p:txBody>
-          <a:bodyPr wrap="square">
-            <a:spAutoFit/>
-          </a:bodyPr>
-          <a:lstStyle/>
-          <a:p>
-            <a:pPr>
-              <a:defRPr sz="2400" b="1">
-                <a:solidFill>
-                  <a:srgbClr val="FFFFFF"/>
-                </a:solidFill>
-                <a:latin typeface="Arial"/>
-              </a:defRPr>
-            </a:pPr>
-            <a:r>
-              <a:t>3. Сфера застосування: де впроваджується технологія</a:t>
-            </a:r>
-          </a:p>
-        </p:txBody>
-      </p:sp>
-      <p:sp>
-        <p:nvSpPr>
-          <p:cNvPr id="5" name="Rounded Rectangle 4"/>
+          <p:cNvPr id="3" name="Rounded Rectangle 2"/>
           <p:cNvSpPr/>
           <p:nvPr/>
         </p:nvSpPr>
         <p:spPr>
           <a:xfrm>
-            <a:off x="731520" y="1645920"/>
-            <a:ext cx="5257800" cy="2011680"/>
+            <a:off x="731520" y="365760"/>
+            <a:ext cx="4114800" cy="329184"/>
           </a:xfrm>
           <a:prstGeom prst="roundRect">
             <a:avLst/>
           </a:prstGeom>
           <a:solidFill>
-            <a:srgbClr val="161E31"/>
+            <a:srgbClr val="14240C"/>
           </a:solidFill>
           <a:ln>
             <a:solidFill>
-              <a:srgbClr val="283750"/>
+              <a:srgbClr val="76B900"/>
             </a:solidFill>
           </a:ln>
         </p:spPr>
@@ -6477,55 +6104,79 @@
           </a:fontRef>
         </p:style>
         <p:txBody>
-          <a:bodyPr rtlCol="0" anchor="ctr" wrap="square"/>
+          <a:bodyPr rtlCol="0" anchor="ctr"/>
           <a:lstStyle/>
           <a:p>
             <a:pPr algn="ctr">
-              <a:defRPr b="1" sz="1400">
+              <a:defRPr sz="950" b="1">
                 <a:solidFill>
                   <a:srgbClr val="76B900"/>
                 </a:solidFill>
-              </a:defRPr>
-            </a:pPr>
-            <a:r>
-              <a:t>🎮 AAA-геймінг наступного покоління</a:t>
-            </a:r>
-          </a:p>
-          <a:p>
-            <a:br/>
+                <a:latin typeface="Arial"/>
+              </a:defRPr>
+            </a:pPr>
+            <a:r>
+              <a:t>●  ГОЛОВНА НОВИНКА ОСЕНІ 2026   |   СЛАЙД 07 / 12</a:t>
+            </a:r>
+          </a:p>
+        </p:txBody>
+      </p:sp>
+      <p:sp>
+        <p:nvSpPr>
+          <p:cNvPr id="4" name="TextBox 3"/>
+          <p:cNvSpPr txBox="1"/>
+          <p:nvPr/>
+        </p:nvSpPr>
+        <p:spPr>
+          <a:xfrm>
+            <a:off x="731520" y="685800"/>
+            <a:ext cx="10698480" cy="685800"/>
+          </a:xfrm>
+          <a:prstGeom prst="rect">
+            <a:avLst/>
+          </a:prstGeom>
+          <a:noFill/>
+        </p:spPr>
+        <p:txBody>
+          <a:bodyPr wrap="square">
+            <a:spAutoFit/>
+          </a:bodyPr>
+          <a:lstStyle/>
+          <a:p>
             <a:pPr>
-              <a:defRPr sz="1100">
-                <a:solidFill>
-                  <a:srgbClr val="9CA3AF"/>
-                </a:solidFill>
-              </a:defRPr>
-            </a:pPr>
-            <a:r>
-              <a:t>Провідні ігрові студії інтегрують DLSS 5 для досягнення фотореалістичної графіки у відкритих світах (NBA 2K27, Cyberpunk 2077 Next).</a:t>
-            </a:r>
-          </a:p>
-        </p:txBody>
-      </p:sp>
-      <p:sp>
-        <p:nvSpPr>
-          <p:cNvPr id="6" name="Rounded Rectangle 5"/>
+              <a:defRPr sz="2200" b="1">
+                <a:solidFill>
+                  <a:srgbClr val="FFFFFF"/>
+                </a:solidFill>
+                <a:latin typeface="Arial"/>
+              </a:defRPr>
+            </a:pPr>
+            <a:r>
+              <a:t>Оновлення від 16 жовтня 2026 року: подолання кризи продуктивності</a:t>
+            </a:r>
+          </a:p>
+        </p:txBody>
+      </p:sp>
+      <p:sp>
+        <p:nvSpPr>
+          <p:cNvPr id="5" name="Rounded Rectangle 4"/>
           <p:cNvSpPr/>
           <p:nvPr/>
         </p:nvSpPr>
         <p:spPr>
           <a:xfrm>
-            <a:off x="6172200" y="1645920"/>
-            <a:ext cx="5257800" cy="2011680"/>
+            <a:off x="731520" y="1645920"/>
+            <a:ext cx="10698480" cy="822960"/>
           </a:xfrm>
           <a:prstGeom prst="roundRect">
             <a:avLst/>
           </a:prstGeom>
           <a:solidFill>
-            <a:srgbClr val="161E31"/>
+            <a:srgbClr val="23190C"/>
           </a:solidFill>
           <a:ln>
             <a:solidFill>
-              <a:srgbClr val="283750"/>
+              <a:srgbClr val="FBBF24"/>
             </a:solidFill>
           </a:ln>
         </p:spPr>
@@ -6548,51 +6199,38 @@
           <a:lstStyle/>
           <a:p>
             <a:pPr algn="ctr">
-              <a:defRPr b="1" sz="1400">
-                <a:solidFill>
-                  <a:srgbClr val="06B6D4"/>
-                </a:solidFill>
-              </a:defRPr>
-            </a:pPr>
-            <a:r>
-              <a:t>🛠️ Графічні рушії (Unreal Engine 5.5 / 6)</a:t>
-            </a:r>
-          </a:p>
-          <a:p>
-            <a:br/>
-            <a:pPr>
-              <a:defRPr sz="1100">
-                <a:solidFill>
-                  <a:srgbClr val="9CA3AF"/>
-                </a:solidFill>
-              </a:defRPr>
-            </a:pPr>
-            <a:r>
-              <a:t>Вбудований плагін дозволяє розробникам ігор в 1 клік підключати нейронний рендеринг матеріалів без переписування коду гри.</a:t>
-            </a:r>
-          </a:p>
-        </p:txBody>
-      </p:sp>
-      <p:sp>
-        <p:nvSpPr>
-          <p:cNvPr id="7" name="Rounded Rectangle 6"/>
+              <a:defRPr sz="1200" b="1">
+                <a:solidFill>
+                  <a:srgbClr val="FBBF24"/>
+                </a:solidFill>
+              </a:defRPr>
+            </a:pPr>
+            <a:r>
+              <a:t>⚠️ Початковий виклик: у вересневому релізі важка модель знижувала FPS на 50–60%. Жовтневий драйвер перевернув ситуацію:</a:t>
+            </a:r>
+          </a:p>
+        </p:txBody>
+      </p:sp>
+      <p:sp>
+        <p:nvSpPr>
+          <p:cNvPr id="6" name="Rounded Rectangle 5"/>
           <p:cNvSpPr/>
           <p:nvPr/>
         </p:nvSpPr>
         <p:spPr>
           <a:xfrm>
-            <a:off x="731520" y="3931920"/>
-            <a:ext cx="5257800" cy="2011680"/>
+            <a:off x="731520" y="2697480"/>
+            <a:ext cx="2560320" cy="3474720"/>
           </a:xfrm>
           <a:prstGeom prst="roundRect">
             <a:avLst/>
           </a:prstGeom>
           <a:solidFill>
-            <a:srgbClr val="161E31"/>
+            <a:srgbClr val="121826"/>
           </a:solidFill>
           <a:ln>
             <a:solidFill>
-              <a:srgbClr val="283750"/>
+              <a:srgbClr val="76B900"/>
             </a:solidFill>
           </a:ln>
         </p:spPr>
@@ -6615,14 +6253,26 @@
           <a:lstStyle/>
           <a:p>
             <a:pPr algn="ctr">
-              <a:defRPr b="1" sz="1400">
+              <a:defRPr sz="3600" b="1">
                 <a:solidFill>
                   <a:srgbClr val="76B900"/>
                 </a:solidFill>
               </a:defRPr>
             </a:pPr>
             <a:r>
-              <a:t>🎬 Віртуальне кіновиробництво (Virtual Production)</a:t>
+              <a:t>У 2x</a:t>
+            </a:r>
+          </a:p>
+          <a:p>
+            <a:pPr>
+              <a:defRPr sz="1300" b="1">
+                <a:solidFill>
+                  <a:srgbClr val="FFFFFF"/>
+                </a:solidFill>
+              </a:defRPr>
+            </a:pPr>
+            <a:r>
+              <a:t>Швидша модель</a:t>
             </a:r>
           </a:p>
           <a:p>
@@ -6630,36 +6280,36 @@
             <a:pPr>
               <a:defRPr sz="1100">
                 <a:solidFill>
-                  <a:srgbClr val="9CA3AF"/>
-                </a:solidFill>
-              </a:defRPr>
-            </a:pPr>
-            <a:r>
-              <a:t>Створення кінодекорацій у реальному часі на світлодіодних екранах (LED volumes) для голлівудських студій.</a:t>
-            </a:r>
-          </a:p>
-        </p:txBody>
-      </p:sp>
-      <p:sp>
-        <p:nvSpPr>
-          <p:cNvPr id="8" name="Rounded Rectangle 7"/>
+                  <a:srgbClr val="D1D5DB"/>
+                </a:solidFill>
+              </a:defRPr>
+            </a:pPr>
+            <a:r>
+              <a:t>Оптимізація інференсу вдвічі скоротила час генерації кадру на тензорних ядрах.</a:t>
+            </a:r>
+          </a:p>
+        </p:txBody>
+      </p:sp>
+      <p:sp>
+        <p:nvSpPr>
+          <p:cNvPr id="7" name="Rounded Rectangle 6"/>
           <p:cNvSpPr/>
           <p:nvPr/>
         </p:nvSpPr>
         <p:spPr>
           <a:xfrm>
-            <a:off x="6172200" y="3931920"/>
-            <a:ext cx="5257800" cy="2011680"/>
+            <a:off x="3429000" y="2697480"/>
+            <a:ext cx="2560320" cy="3474720"/>
           </a:xfrm>
           <a:prstGeom prst="roundRect">
             <a:avLst/>
           </a:prstGeom>
           <a:solidFill>
-            <a:srgbClr val="161E31"/>
+            <a:srgbClr val="121826"/>
           </a:solidFill>
           <a:ln>
             <a:solidFill>
-              <a:srgbClr val="283750"/>
+              <a:srgbClr val="76B900"/>
             </a:solidFill>
           </a:ln>
         </p:spPr>
@@ -6682,14 +6332,26 @@
           <a:lstStyle/>
           <a:p>
             <a:pPr algn="ctr">
-              <a:defRPr b="1" sz="1400">
-                <a:solidFill>
-                  <a:srgbClr val="06B6D4"/>
-                </a:solidFill>
-              </a:defRPr>
-            </a:pPr>
-            <a:r>
-              <a:t>🌐 Хмарний веб-геймінг (GeForce NOW у браузері)</a:t>
+              <a:defRPr sz="3600" b="1">
+                <a:solidFill>
+                  <a:srgbClr val="76B900"/>
+                </a:solidFill>
+              </a:defRPr>
+            </a:pPr>
+            <a:r>
+              <a:t>-24%</a:t>
+            </a:r>
+          </a:p>
+          <a:p>
+            <a:pPr>
+              <a:defRPr sz="1300" b="1">
+                <a:solidFill>
+                  <a:srgbClr val="FFFFFF"/>
+                </a:solidFill>
+              </a:defRPr>
+            </a:pPr>
+            <a:r>
+              <a:t>Розмір мережі</a:t>
             </a:r>
           </a:p>
           <a:p>
@@ -6697,12 +6359,170 @@
             <a:pPr>
               <a:defRPr sz="1100">
                 <a:solidFill>
-                  <a:srgbClr val="9CA3AF"/>
-                </a:solidFill>
-              </a:defRPr>
-            </a:pPr>
-            <a:r>
-              <a:t>Трансляція ігор кінематографічного рівня через WebRTC прямо у вікно браузера Chrome без потреби мати суперкомп'ютер вдома.</a:t>
+                  <a:srgbClr val="D1D5DB"/>
+                </a:solidFill>
+              </a:defRPr>
+            </a:pPr>
+            <a:r>
+              <a:t>Архітектурне стиснення ваг дозволило завантажувати модель у кеш без затримок.</a:t>
+            </a:r>
+          </a:p>
+        </p:txBody>
+      </p:sp>
+      <p:sp>
+        <p:nvSpPr>
+          <p:cNvPr id="8" name="Rounded Rectangle 7"/>
+          <p:cNvSpPr/>
+          <p:nvPr/>
+        </p:nvSpPr>
+        <p:spPr>
+          <a:xfrm>
+            <a:off x="6126480" y="2697480"/>
+            <a:ext cx="2560320" cy="3474720"/>
+          </a:xfrm>
+          <a:prstGeom prst="roundRect">
+            <a:avLst/>
+          </a:prstGeom>
+          <a:solidFill>
+            <a:srgbClr val="121826"/>
+          </a:solidFill>
+          <a:ln>
+            <a:solidFill>
+              <a:srgbClr val="76B900"/>
+            </a:solidFill>
+          </a:ln>
+        </p:spPr>
+        <p:style>
+          <a:lnRef idx="1">
+            <a:schemeClr val="accent1"/>
+          </a:lnRef>
+          <a:fillRef idx="3">
+            <a:schemeClr val="accent1"/>
+          </a:fillRef>
+          <a:effectRef idx="2">
+            <a:schemeClr val="accent1"/>
+          </a:effectRef>
+          <a:fontRef idx="minor">
+            <a:schemeClr val="lt1"/>
+          </a:fontRef>
+        </p:style>
+        <p:txBody>
+          <a:bodyPr rtlCol="0" anchor="ctr" wrap="square"/>
+          <a:lstStyle/>
+          <a:p>
+            <a:pPr algn="ctr">
+              <a:defRPr sz="3600" b="1">
+                <a:solidFill>
+                  <a:srgbClr val="76B900"/>
+                </a:solidFill>
+              </a:defRPr>
+            </a:pPr>
+            <a:r>
+              <a:t>-20%</a:t>
+            </a:r>
+          </a:p>
+          <a:p>
+            <a:pPr>
+              <a:defRPr sz="1300" b="1">
+                <a:solidFill>
+                  <a:srgbClr val="FFFFFF"/>
+                </a:solidFill>
+              </a:defRPr>
+            </a:pPr>
+            <a:r>
+              <a:t>VRAM у 4K</a:t>
+            </a:r>
+          </a:p>
+          <a:p>
+            <a:br/>
+            <a:pPr>
+              <a:defRPr sz="1100">
+                <a:solidFill>
+                  <a:srgbClr val="D1D5DB"/>
+                </a:solidFill>
+              </a:defRPr>
+            </a:pPr>
+            <a:r>
+              <a:t>Звільнено понад 3 ГБ відеопам'яті в роздільності 4K для текстур надвисокої чіткості.</a:t>
+            </a:r>
+          </a:p>
+        </p:txBody>
+      </p:sp>
+      <p:sp>
+        <p:nvSpPr>
+          <p:cNvPr id="9" name="Rounded Rectangle 8"/>
+          <p:cNvSpPr/>
+          <p:nvPr/>
+        </p:nvSpPr>
+        <p:spPr>
+          <a:xfrm>
+            <a:off x="8823960" y="2697480"/>
+            <a:ext cx="2560320" cy="3474720"/>
+          </a:xfrm>
+          <a:prstGeom prst="roundRect">
+            <a:avLst/>
+          </a:prstGeom>
+          <a:solidFill>
+            <a:srgbClr val="121826"/>
+          </a:solidFill>
+          <a:ln>
+            <a:solidFill>
+              <a:srgbClr val="76B900"/>
+            </a:solidFill>
+          </a:ln>
+        </p:spPr>
+        <p:style>
+          <a:lnRef idx="1">
+            <a:schemeClr val="accent1"/>
+          </a:lnRef>
+          <a:fillRef idx="3">
+            <a:schemeClr val="accent1"/>
+          </a:fillRef>
+          <a:effectRef idx="2">
+            <a:schemeClr val="accent1"/>
+          </a:effectRef>
+          <a:fontRef idx="minor">
+            <a:schemeClr val="lt1"/>
+          </a:fontRef>
+        </p:style>
+        <p:txBody>
+          <a:bodyPr rtlCol="0" anchor="ctr" wrap="square"/>
+          <a:lstStyle/>
+          <a:p>
+            <a:pPr algn="ctr">
+              <a:defRPr sz="3600" b="1">
+                <a:solidFill>
+                  <a:srgbClr val="76B900"/>
+                </a:solidFill>
+              </a:defRPr>
+            </a:pPr>
+            <a:r>
+              <a:t>+35%</a:t>
+            </a:r>
+          </a:p>
+          <a:p>
+            <a:pPr>
+              <a:defRPr sz="1300" b="1">
+                <a:solidFill>
+                  <a:srgbClr val="FFFFFF"/>
+                </a:solidFill>
+              </a:defRPr>
+            </a:pPr>
+            <a:r>
+              <a:t>Preset C</a:t>
+            </a:r>
+          </a:p>
+          <a:p>
+            <a:br/>
+            <a:pPr>
+              <a:defRPr sz="1100">
+                <a:solidFill>
+                  <a:srgbClr val="D1D5DB"/>
+                </a:solidFill>
+              </a:defRPr>
+            </a:pPr>
+            <a:r>
+              <a:t>Спеціальний легкий режим, що дав змогу запускати нейронне світло на масових картах RTX 5060.</a:t>
             </a:r>
           </a:p>
         </p:txBody>
@@ -6740,7 +6560,7 @@
             <a:avLst/>
           </a:prstGeom>
           <a:solidFill>
-            <a:srgbClr val="0B0F17"/>
+            <a:srgbClr val="0A0D14"/>
           </a:solidFill>
           <a:ln>
             <a:noFill/>
@@ -6770,96 +6590,24 @@
       </p:sp>
       <p:sp>
         <p:nvSpPr>
-          <p:cNvPr id="3" name="TextBox 2"/>
-          <p:cNvSpPr txBox="1"/>
-          <p:nvPr/>
-        </p:nvSpPr>
-        <p:spPr>
-          <a:xfrm>
-            <a:off x="731520" y="365760"/>
-            <a:ext cx="7315200" cy="365760"/>
-          </a:xfrm>
-          <a:prstGeom prst="rect">
-            <a:avLst/>
-          </a:prstGeom>
-          <a:noFill/>
-        </p:spPr>
-        <p:txBody>
-          <a:bodyPr wrap="square">
-            <a:spAutoFit/>
-          </a:bodyPr>
-          <a:lstStyle/>
-          <a:p>
-            <a:pPr>
-              <a:defRPr sz="1000" b="1">
-                <a:solidFill>
-                  <a:srgbClr val="76B900"/>
-                </a:solidFill>
-                <a:latin typeface="Arial"/>
-              </a:defRPr>
-            </a:pPr>
-            <a:r>
-              <a:t>●  РЕГЛАМЕНТ: ПУНКТ 4   |   СЛАЙД 08 / 12</a:t>
-            </a:r>
-          </a:p>
-        </p:txBody>
-      </p:sp>
-      <p:sp>
-        <p:nvSpPr>
-          <p:cNvPr id="4" name="TextBox 3"/>
-          <p:cNvSpPr txBox="1"/>
-          <p:nvPr/>
-        </p:nvSpPr>
-        <p:spPr>
-          <a:xfrm>
-            <a:off x="731520" y="640080"/>
-            <a:ext cx="10515600" cy="731520"/>
-          </a:xfrm>
-          <a:prstGeom prst="rect">
-            <a:avLst/>
-          </a:prstGeom>
-          <a:noFill/>
-        </p:spPr>
-        <p:txBody>
-          <a:bodyPr wrap="square">
-            <a:spAutoFit/>
-          </a:bodyPr>
-          <a:lstStyle/>
-          <a:p>
-            <a:pPr>
-              <a:defRPr sz="2400" b="1">
-                <a:solidFill>
-                  <a:srgbClr val="FFFFFF"/>
-                </a:solidFill>
-                <a:latin typeface="Arial"/>
-              </a:defRPr>
-            </a:pPr>
-            <a:r>
-              <a:t>4. Доступність для споживачів: залізо, софт та ціна</a:t>
-            </a:r>
-          </a:p>
-        </p:txBody>
-      </p:sp>
-      <p:sp>
-        <p:nvSpPr>
-          <p:cNvPr id="5" name="Rounded Rectangle 4"/>
+          <p:cNvPr id="3" name="Rounded Rectangle 2"/>
           <p:cNvSpPr/>
           <p:nvPr/>
         </p:nvSpPr>
         <p:spPr>
           <a:xfrm>
-            <a:off x="731520" y="1645920"/>
-            <a:ext cx="10698480" cy="1005840"/>
+            <a:off x="731520" y="365760"/>
+            <a:ext cx="4114800" cy="329184"/>
           </a:xfrm>
           <a:prstGeom prst="roundRect">
             <a:avLst/>
           </a:prstGeom>
           <a:solidFill>
-            <a:srgbClr val="161E31"/>
+            <a:srgbClr val="14240C"/>
           </a:solidFill>
           <a:ln>
             <a:solidFill>
-              <a:srgbClr val="283750"/>
+              <a:srgbClr val="76B900"/>
             </a:solidFill>
           </a:ln>
         </p:spPr>
@@ -6878,50 +6626,79 @@
           </a:fontRef>
         </p:style>
         <p:txBody>
-          <a:bodyPr rtlCol="0" anchor="ctr" wrap="square"/>
+          <a:bodyPr rtlCol="0" anchor="ctr"/>
           <a:lstStyle/>
           <a:p>
             <a:pPr algn="ctr">
-              <a:defRPr b="1" sz="1300">
+              <a:defRPr sz="950" b="1">
                 <a:solidFill>
                   <a:srgbClr val="76B900"/>
                 </a:solidFill>
-              </a:defRPr>
-            </a:pPr>
-            <a:r>
-              <a:t>💻 Апаратні вимоги  ➔  </a:t>
-            </a:r>
-            <a:r>
-              <a:rPr b="0" sz="1200">
+                <a:latin typeface="Arial"/>
+              </a:defRPr>
+            </a:pPr>
+            <a:r>
+              <a:t>●  РЕГЛАМЕНТ: ПУНКТ 3   |   СЛАЙД 08 / 12</a:t>
+            </a:r>
+          </a:p>
+        </p:txBody>
+      </p:sp>
+      <p:sp>
+        <p:nvSpPr>
+          <p:cNvPr id="4" name="TextBox 3"/>
+          <p:cNvSpPr txBox="1"/>
+          <p:nvPr/>
+        </p:nvSpPr>
+        <p:spPr>
+          <a:xfrm>
+            <a:off x="731520" y="685800"/>
+            <a:ext cx="10698480" cy="685800"/>
+          </a:xfrm>
+          <a:prstGeom prst="rect">
+            <a:avLst/>
+          </a:prstGeom>
+          <a:noFill/>
+        </p:spPr>
+        <p:txBody>
+          <a:bodyPr wrap="square">
+            <a:spAutoFit/>
+          </a:bodyPr>
+          <a:lstStyle/>
+          <a:p>
+            <a:pPr>
+              <a:defRPr sz="2200" b="1">
                 <a:solidFill>
                   <a:srgbClr val="FFFFFF"/>
                 </a:solidFill>
-              </a:rPr>
-              <a:t>Відеокарти серії GeForce RTX 50 (Blackwell) та RTX 40 з оновленими тензорними ядрами 5-го покоління.</a:t>
-            </a:r>
-          </a:p>
-        </p:txBody>
-      </p:sp>
-      <p:sp>
-        <p:nvSpPr>
-          <p:cNvPr id="6" name="Rounded Rectangle 5"/>
+                <a:latin typeface="Arial"/>
+              </a:defRPr>
+            </a:pPr>
+            <a:r>
+              <a:t>3. Сфера застосування: від геймінгу до віртуального кіновиробництва</a:t>
+            </a:r>
+          </a:p>
+        </p:txBody>
+      </p:sp>
+      <p:sp>
+        <p:nvSpPr>
+          <p:cNvPr id="5" name="Rounded Rectangle 4"/>
           <p:cNvSpPr/>
           <p:nvPr/>
         </p:nvSpPr>
         <p:spPr>
           <a:xfrm>
-            <a:off x="731520" y="2788920"/>
-            <a:ext cx="10698480" cy="1005840"/>
+            <a:off x="731520" y="1645920"/>
+            <a:ext cx="5257800" cy="2057400"/>
           </a:xfrm>
           <a:prstGeom prst="roundRect">
             <a:avLst/>
           </a:prstGeom>
           <a:solidFill>
-            <a:srgbClr val="161E31"/>
+            <a:srgbClr val="121826"/>
           </a:solidFill>
           <a:ln>
             <a:solidFill>
-              <a:srgbClr val="283750"/>
+              <a:srgbClr val="222D44"/>
             </a:solidFill>
           </a:ln>
         </p:spPr>
@@ -6944,46 +6721,51 @@
           <a:lstStyle/>
           <a:p>
             <a:pPr algn="ctr">
-              <a:defRPr b="1" sz="1300">
+              <a:defRPr sz="1400" b="1">
                 <a:solidFill>
                   <a:srgbClr val="76B900"/>
                 </a:solidFill>
               </a:defRPr>
             </a:pPr>
             <a:r>
-              <a:t>📦 Безкоштовність для гравця  ➔  </a:t>
-            </a:r>
-            <a:r>
-              <a:rPr b="0" sz="1200">
-                <a:solidFill>
-                  <a:srgbClr val="FFFFFF"/>
-                </a:solidFill>
-              </a:rPr>
-              <a:t>Технологія безкоштовно активується в налаштуваннях гри; потрібен лише драйвер NVIDIA Game Ready від жовтня 2026.</a:t>
-            </a:r>
-          </a:p>
-        </p:txBody>
-      </p:sp>
-      <p:sp>
-        <p:nvSpPr>
-          <p:cNvPr id="7" name="Rounded Rectangle 6"/>
+              <a:t>🎮 AAA-геймінг нового покоління</a:t>
+            </a:r>
+          </a:p>
+          <a:p>
+            <a:br/>
+            <a:pPr>
+              <a:defRPr sz="1150">
+                <a:solidFill>
+                  <a:srgbClr val="D1D5DB"/>
+                </a:solidFill>
+              </a:defRPr>
+            </a:pPr>
+            <a:r>
+              <a:t>Флагманські проекти (NBA 2K27, Cyberpunk Next). Гравці отримують кінематографічний фотореалізм без лагів.</a:t>
+            </a:r>
+          </a:p>
+        </p:txBody>
+      </p:sp>
+      <p:sp>
+        <p:nvSpPr>
+          <p:cNvPr id="6" name="Rounded Rectangle 5"/>
           <p:cNvSpPr/>
           <p:nvPr/>
         </p:nvSpPr>
         <p:spPr>
           <a:xfrm>
-            <a:off x="731520" y="3931920"/>
-            <a:ext cx="10698480" cy="1005840"/>
+            <a:off x="6172200" y="1645920"/>
+            <a:ext cx="5257800" cy="2057400"/>
           </a:xfrm>
           <a:prstGeom prst="roundRect">
             <a:avLst/>
           </a:prstGeom>
           <a:solidFill>
-            <a:srgbClr val="161E31"/>
+            <a:srgbClr val="121826"/>
           </a:solidFill>
           <a:ln>
             <a:solidFill>
-              <a:srgbClr val="283750"/>
+              <a:srgbClr val="222D44"/>
             </a:solidFill>
           </a:ln>
         </p:spPr>
@@ -7006,46 +6788,51 @@
           <a:lstStyle/>
           <a:p>
             <a:pPr algn="ctr">
-              <a:defRPr b="1" sz="1300">
-                <a:solidFill>
-                  <a:srgbClr val="76B900"/>
-                </a:solidFill>
-              </a:defRPr>
-            </a:pPr>
-            <a:r>
-              <a:t>👨‍💻 Відкритий SDK розробника  ➔  </a:t>
-            </a:r>
-            <a:r>
-              <a:rPr b="0" sz="1200">
-                <a:solidFill>
-                  <a:srgbClr val="FFFFFF"/>
-                </a:solidFill>
-              </a:rPr>
-              <a:t>NVIDIA надає безкоштовний DLSS 5 SDK та плагіни для ігрових рушіїв без роялті.</a:t>
-            </a:r>
-          </a:p>
-        </p:txBody>
-      </p:sp>
-      <p:sp>
-        <p:nvSpPr>
-          <p:cNvPr id="8" name="Rounded Rectangle 7"/>
+              <a:defRPr sz="1400" b="1">
+                <a:solidFill>
+                  <a:srgbClr val="22D3EE"/>
+                </a:solidFill>
+              </a:defRPr>
+            </a:pPr>
+            <a:r>
+              <a:t>🛠️ Графічні веб-рушії та Unreal Engine</a:t>
+            </a:r>
+          </a:p>
+          <a:p>
+            <a:br/>
+            <a:pPr>
+              <a:defRPr sz="1150">
+                <a:solidFill>
+                  <a:srgbClr val="D1D5DB"/>
+                </a:solidFill>
+              </a:defRPr>
+            </a:pPr>
+            <a:r>
+              <a:t>Офіційні плагіни для Unreal Engine 5.5 / 6 та Unity дозволяють студіям вмикати нейронне світло одним перемикачем.</a:t>
+            </a:r>
+          </a:p>
+        </p:txBody>
+      </p:sp>
+      <p:sp>
+        <p:nvSpPr>
+          <p:cNvPr id="7" name="Rounded Rectangle 6"/>
           <p:cNvSpPr/>
           <p:nvPr/>
         </p:nvSpPr>
         <p:spPr>
           <a:xfrm>
-            <a:off x="731520" y="5074920"/>
-            <a:ext cx="10698480" cy="1005840"/>
+            <a:off x="731520" y="3931920"/>
+            <a:ext cx="5257800" cy="2057400"/>
           </a:xfrm>
           <a:prstGeom prst="roundRect">
             <a:avLst/>
           </a:prstGeom>
           <a:solidFill>
-            <a:srgbClr val="161E31"/>
+            <a:srgbClr val="121826"/>
           </a:solidFill>
           <a:ln>
             <a:solidFill>
-              <a:srgbClr val="283750"/>
+              <a:srgbClr val="222D44"/>
             </a:solidFill>
           </a:ln>
         </p:spPr>
@@ -7068,22 +6855,94 @@
           <a:lstStyle/>
           <a:p>
             <a:pPr algn="ctr">
-              <a:defRPr b="1" sz="1300">
+              <a:defRPr sz="1400" b="1">
                 <a:solidFill>
                   <a:srgbClr val="76B900"/>
                 </a:solidFill>
               </a:defRPr>
             </a:pPr>
             <a:r>
-              <a:t>⚙️ Демократизація через Preset C  ➔  </a:t>
-            </a:r>
-            <a:r>
-              <a:rPr b="0" sz="1200">
-                <a:solidFill>
-                  <a:srgbClr val="FFFFFF"/>
-                </a:solidFill>
-              </a:rPr>
-              <a:t>Оптимізований режим дозволяє запускати технологію навіть на масових картах класу RTX 5060.</a:t>
+              <a:t>🎬 Віртуальне кіно (Virtual Production)</a:t>
+            </a:r>
+          </a:p>
+          <a:p>
+            <a:br/>
+            <a:pPr>
+              <a:defRPr sz="1150">
+                <a:solidFill>
+                  <a:srgbClr val="D1D5DB"/>
+                </a:solidFill>
+              </a:defRPr>
+            </a:pPr>
+            <a:r>
+              <a:t>Зйомки фільмів на світлодіодних LED-стінах у реальному часі без необхідності місяцями рендерити сцени на серверах.</a:t>
+            </a:r>
+          </a:p>
+        </p:txBody>
+      </p:sp>
+      <p:sp>
+        <p:nvSpPr>
+          <p:cNvPr id="8" name="Rounded Rectangle 7"/>
+          <p:cNvSpPr/>
+          <p:nvPr/>
+        </p:nvSpPr>
+        <p:spPr>
+          <a:xfrm>
+            <a:off x="6172200" y="3931920"/>
+            <a:ext cx="5257800" cy="2057400"/>
+          </a:xfrm>
+          <a:prstGeom prst="roundRect">
+            <a:avLst/>
+          </a:prstGeom>
+          <a:solidFill>
+            <a:srgbClr val="121826"/>
+          </a:solidFill>
+          <a:ln>
+            <a:solidFill>
+              <a:srgbClr val="222D44"/>
+            </a:solidFill>
+          </a:ln>
+        </p:spPr>
+        <p:style>
+          <a:lnRef idx="1">
+            <a:schemeClr val="accent1"/>
+          </a:lnRef>
+          <a:fillRef idx="3">
+            <a:schemeClr val="accent1"/>
+          </a:fillRef>
+          <a:effectRef idx="2">
+            <a:schemeClr val="accent1"/>
+          </a:effectRef>
+          <a:fontRef idx="minor">
+            <a:schemeClr val="lt1"/>
+          </a:fontRef>
+        </p:style>
+        <p:txBody>
+          <a:bodyPr rtlCol="0" anchor="ctr" wrap="square"/>
+          <a:lstStyle/>
+          <a:p>
+            <a:pPr algn="ctr">
+              <a:defRPr sz="1400" b="1">
+                <a:solidFill>
+                  <a:srgbClr val="22D3EE"/>
+                </a:solidFill>
+              </a:defRPr>
+            </a:pPr>
+            <a:r>
+              <a:t>🌐 Хмарний геймінг (GeForce NOW у Web)</a:t>
+            </a:r>
+          </a:p>
+          <a:p>
+            <a:br/>
+            <a:pPr>
+              <a:defRPr sz="1150">
+                <a:solidFill>
+                  <a:srgbClr val="D1D5DB"/>
+                </a:solidFill>
+              </a:defRPr>
+            </a:pPr>
+            <a:r>
+              <a:t>Трансляція ігор наступного покоління через браузер Chrome/Edge на слабкі ноутбуки та смартфони.</a:t>
             </a:r>
           </a:p>
         </p:txBody>
@@ -7121,7 +6980,7 @@
             <a:avLst/>
           </a:prstGeom>
           <a:solidFill>
-            <a:srgbClr val="0B0F17"/>
+            <a:srgbClr val="0A0D14"/>
           </a:solidFill>
           <a:ln>
             <a:noFill/>
@@ -7151,14 +7010,69 @@
       </p:sp>
       <p:sp>
         <p:nvSpPr>
-          <p:cNvPr id="3" name="TextBox 2"/>
+          <p:cNvPr id="3" name="Rounded Rectangle 2"/>
+          <p:cNvSpPr/>
+          <p:nvPr/>
+        </p:nvSpPr>
+        <p:spPr>
+          <a:xfrm>
+            <a:off x="731520" y="365760"/>
+            <a:ext cx="4114800" cy="329184"/>
+          </a:xfrm>
+          <a:prstGeom prst="roundRect">
+            <a:avLst/>
+          </a:prstGeom>
+          <a:solidFill>
+            <a:srgbClr val="14240C"/>
+          </a:solidFill>
+          <a:ln>
+            <a:solidFill>
+              <a:srgbClr val="76B900"/>
+            </a:solidFill>
+          </a:ln>
+        </p:spPr>
+        <p:style>
+          <a:lnRef idx="1">
+            <a:schemeClr val="accent1"/>
+          </a:lnRef>
+          <a:fillRef idx="3">
+            <a:schemeClr val="accent1"/>
+          </a:fillRef>
+          <a:effectRef idx="2">
+            <a:schemeClr val="accent1"/>
+          </a:effectRef>
+          <a:fontRef idx="minor">
+            <a:schemeClr val="lt1"/>
+          </a:fontRef>
+        </p:style>
+        <p:txBody>
+          <a:bodyPr rtlCol="0" anchor="ctr"/>
+          <a:lstStyle/>
+          <a:p>
+            <a:pPr algn="ctr">
+              <a:defRPr sz="950" b="1">
+                <a:solidFill>
+                  <a:srgbClr val="76B900"/>
+                </a:solidFill>
+                <a:latin typeface="Arial"/>
+              </a:defRPr>
+            </a:pPr>
+            <a:r>
+              <a:t>●  РЕГЛАМЕНТ: ПУНКТ 4   |   СЛАЙД 09 / 12</a:t>
+            </a:r>
+          </a:p>
+        </p:txBody>
+      </p:sp>
+      <p:sp>
+        <p:nvSpPr>
+          <p:cNvPr id="4" name="TextBox 3"/>
           <p:cNvSpPr txBox="1"/>
           <p:nvPr/>
         </p:nvSpPr>
         <p:spPr>
           <a:xfrm>
-            <a:off x="731520" y="365760"/>
-            <a:ext cx="7315200" cy="365760"/>
+            <a:off x="731520" y="685800"/>
+            <a:ext cx="10698480" cy="685800"/>
           </a:xfrm>
           <a:prstGeom prst="rect">
             <a:avLst/>
@@ -7172,437 +7086,267 @@
           <a:lstStyle/>
           <a:p>
             <a:pPr>
-              <a:defRPr sz="1000" b="1">
-                <a:solidFill>
-                  <a:srgbClr val="76B900"/>
+              <a:defRPr sz="2200" b="1">
+                <a:solidFill>
+                  <a:srgbClr val="FFFFFF"/>
                 </a:solidFill>
                 <a:latin typeface="Arial"/>
               </a:defRPr>
             </a:pPr>
             <a:r>
-              <a:t>●  РЕГЛАМЕНТ: ПУНКТ 5   |   СЛАЙД 09 / 12</a:t>
-            </a:r>
-          </a:p>
-        </p:txBody>
-      </p:sp>
-      <p:sp>
-        <p:nvSpPr>
-          <p:cNvPr id="4" name="TextBox 3"/>
-          <p:cNvSpPr txBox="1"/>
+              <a:t>4. Доступність для споживачів: вимоги, ліцензія та підтримка</a:t>
+            </a:r>
+          </a:p>
+        </p:txBody>
+      </p:sp>
+      <p:sp>
+        <p:nvSpPr>
+          <p:cNvPr id="5" name="Rounded Rectangle 4"/>
+          <p:cNvSpPr/>
           <p:nvPr/>
         </p:nvSpPr>
         <p:spPr>
           <a:xfrm>
-            <a:off x="731520" y="640080"/>
-            <a:ext cx="10515600" cy="731520"/>
-          </a:xfrm>
-          <a:prstGeom prst="rect">
+            <a:off x="731520" y="1645920"/>
+            <a:ext cx="10698480" cy="1005840"/>
+          </a:xfrm>
+          <a:prstGeom prst="roundRect">
             <a:avLst/>
           </a:prstGeom>
-          <a:noFill/>
-        </p:spPr>
-        <p:txBody>
-          <a:bodyPr wrap="square">
-            <a:spAutoFit/>
-          </a:bodyPr>
-          <a:lstStyle/>
-          <a:p>
-            <a:pPr>
-              <a:defRPr sz="2400" b="1">
+          <a:solidFill>
+            <a:srgbClr val="121826"/>
+          </a:solidFill>
+          <a:ln>
+            <a:solidFill>
+              <a:srgbClr val="222D44"/>
+            </a:solidFill>
+          </a:ln>
+        </p:spPr>
+        <p:style>
+          <a:lnRef idx="1">
+            <a:schemeClr val="accent1"/>
+          </a:lnRef>
+          <a:fillRef idx="3">
+            <a:schemeClr val="accent1"/>
+          </a:fillRef>
+          <a:effectRef idx="2">
+            <a:schemeClr val="accent1"/>
+          </a:effectRef>
+          <a:fontRef idx="minor">
+            <a:schemeClr val="lt1"/>
+          </a:fontRef>
+        </p:style>
+        <p:txBody>
+          <a:bodyPr rtlCol="0" anchor="ctr" wrap="square"/>
+          <a:lstStyle/>
+          <a:p>
+            <a:pPr algn="ctr">
+              <a:defRPr sz="1300" b="1">
+                <a:solidFill>
+                  <a:srgbClr val="76B900"/>
+                </a:solidFill>
+              </a:defRPr>
+            </a:pPr>
+            <a:r>
+              <a:t>💻 Апаратні вимоги  ➔  </a:t>
+            </a:r>
+            <a:r>
+              <a:rPr sz="1200" b="0">
                 <a:solidFill>
                   <a:srgbClr val="FFFFFF"/>
                 </a:solidFill>
-                <a:latin typeface="Arial"/>
-              </a:defRPr>
-            </a:pPr>
-            <a:r>
-              <a:t>5. Ефект від використання: реальні тести у 4K (NBA 2K27, RTX 5090)</a:t>
-            </a:r>
-          </a:p>
-        </p:txBody>
-      </p:sp>
-      <p:graphicFrame>
-        <p:nvGraphicFramePr>
-          <p:cNvPr id="5" name="Table 4"/>
-          <p:cNvGraphicFramePr>
-            <a:graphicFrameLocks noGrp="1"/>
-          </p:cNvGraphicFramePr>
+              </a:rPr>
+              <a:t>Відеокарти серії GeForce RTX 50 (Blackwell) та RTX 40 з оновленими тензорними ядрами.</a:t>
+            </a:r>
+          </a:p>
+        </p:txBody>
+      </p:sp>
+      <p:sp>
+        <p:nvSpPr>
+          <p:cNvPr id="6" name="Rounded Rectangle 5"/>
+          <p:cNvSpPr/>
           <p:nvPr/>
-        </p:nvGraphicFramePr>
-        <p:xfrm>
-          <a:off x="731520" y="1645920"/>
-          <a:ext cx="10698480" cy="4389120"/>
-        </p:xfrm>
-        <a:graphic>
-          <a:graphicData uri="http://schemas.openxmlformats.org/drawingml/2006/table">
-            <a:tbl>
-              <a:tblPr firstRow="1" bandRow="1">
-                <a:tableStyleId>{5C22544A-7EE6-4342-B048-85BDC9FD1C3A}</a:tableStyleId>
-              </a:tblPr>
-              <a:tblGrid>
-                <a:gridCol w="2926080"/>
-                <a:gridCol w="3840480"/>
-                <a:gridCol w="3931920"/>
-              </a:tblGrid>
-              <a:tr h="877824">
-                <a:tc>
-                  <a:txBody>
-                    <a:bodyPr/>
-                    <a:lstStyle/>
-                    <a:p>
-                      <a:pPr>
-                        <a:defRPr sz="1200" b="1">
-                          <a:solidFill>
-                            <a:srgbClr val="FFFFFF"/>
-                          </a:solidFill>
-                        </a:defRPr>
-                      </a:pPr>
-                      <a:r>
-                        <a:t>Параметр сцени</a:t>
-                      </a:r>
-                    </a:p>
-                  </a:txBody>
-                  <a:tcPr anchor="ctr">
-                    <a:solidFill>
-                      <a:srgbClr val="192337"/>
-                    </a:solidFill>
-                  </a:tcPr>
-                </a:tc>
-                <a:tc>
-                  <a:txBody>
-                    <a:bodyPr/>
-                    <a:lstStyle/>
-                    <a:p>
-                      <a:pPr>
-                        <a:defRPr sz="1200" b="1">
-                          <a:solidFill>
-                            <a:srgbClr val="FFFFFF"/>
-                          </a:solidFill>
-                        </a:defRPr>
-                      </a:pPr>
-                      <a:r>
-                        <a:t>Без DLSS 5 (Класика)</a:t>
-                      </a:r>
-                    </a:p>
-                  </a:txBody>
-                  <a:tcPr anchor="ctr">
-                    <a:solidFill>
-                      <a:srgbClr val="192337"/>
-                    </a:solidFill>
-                  </a:tcPr>
-                </a:tc>
-                <a:tc>
-                  <a:txBody>
-                    <a:bodyPr/>
-                    <a:lstStyle/>
-                    <a:p>
-                      <a:pPr>
-                        <a:defRPr sz="1200" b="1">
-                          <a:solidFill>
-                            <a:srgbClr val="76B900"/>
-                          </a:solidFill>
-                        </a:defRPr>
-                      </a:pPr>
-                      <a:r>
-                        <a:t>З DLSS 5 (Оновлення 16 жовтня)</a:t>
-                      </a:r>
-                    </a:p>
-                  </a:txBody>
-                  <a:tcPr anchor="ctr">
-                    <a:solidFill>
-                      <a:srgbClr val="192337"/>
-                    </a:solidFill>
-                  </a:tcPr>
-                </a:tc>
-              </a:tr>
-              <a:tr h="877824">
-                <a:tc>
-                  <a:txBody>
-                    <a:bodyPr/>
-                    <a:lstStyle/>
-                    <a:p>
-                      <a:pPr>
-                        <a:defRPr sz="1200">
-                          <a:solidFill>
-                            <a:srgbClr val="FFFFFF"/>
-                          </a:solidFill>
-                        </a:defRPr>
-                      </a:pPr>
-                      <a:r>
-                        <a:t>Шкіра персонажа</a:t>
-                      </a:r>
-                    </a:p>
-                  </a:txBody>
-                  <a:tcPr anchor="ctr">
-                    <a:solidFill>
-                      <a:srgbClr val="121928"/>
-                    </a:solidFill>
-                  </a:tcPr>
-                </a:tc>
-                <a:tc>
-                  <a:txBody>
-                    <a:bodyPr/>
-                    <a:lstStyle/>
-                    <a:p>
-                      <a:pPr>
-                        <a:defRPr sz="1200">
-                          <a:solidFill>
-                            <a:srgbClr val="FFFFFF"/>
-                          </a:solidFill>
-                        </a:defRPr>
-                      </a:pPr>
-                      <a:r>
-                        <a:t>Гладка, пластикова, без розсіювання</a:t>
-                      </a:r>
-                    </a:p>
-                  </a:txBody>
-                  <a:tcPr anchor="ctr">
-                    <a:solidFill>
-                      <a:srgbClr val="121928"/>
-                    </a:solidFill>
-                  </a:tcPr>
-                </a:tc>
-                <a:tc>
-                  <a:txBody>
-                    <a:bodyPr/>
-                    <a:lstStyle/>
-                    <a:p>
-                      <a:pPr>
-                        <a:defRPr sz="1200">
-                          <a:solidFill>
-                            <a:srgbClr val="76B900"/>
-                          </a:solidFill>
-                        </a:defRPr>
-                      </a:pPr>
-                      <a:r>
-                        <a:t>Живе розсіювання (Subsurface), пори, мікротіні</a:t>
-                      </a:r>
-                    </a:p>
-                  </a:txBody>
-                  <a:tcPr anchor="ctr">
-                    <a:solidFill>
-                      <a:srgbClr val="121928"/>
-                    </a:solidFill>
-                  </a:tcPr>
-                </a:tc>
-              </a:tr>
-              <a:tr h="877824">
-                <a:tc>
-                  <a:txBody>
-                    <a:bodyPr/>
-                    <a:lstStyle/>
-                    <a:p>
-                      <a:pPr>
-                        <a:defRPr sz="1200">
-                          <a:solidFill>
-                            <a:srgbClr val="FFFFFF"/>
-                          </a:solidFill>
-                        </a:defRPr>
-                      </a:pPr>
-                      <a:r>
-                        <a:t>Тканини та волосся</a:t>
-                      </a:r>
-                    </a:p>
-                  </a:txBody>
-                  <a:tcPr anchor="ctr">
-                    <a:solidFill>
-                      <a:srgbClr val="161E31"/>
-                    </a:solidFill>
-                  </a:tcPr>
-                </a:tc>
-                <a:tc>
-                  <a:txBody>
-                    <a:bodyPr/>
-                    <a:lstStyle/>
-                    <a:p>
-                      <a:pPr>
-                        <a:defRPr sz="1200">
-                          <a:solidFill>
-                            <a:srgbClr val="FFFFFF"/>
-                          </a:solidFill>
-                        </a:defRPr>
-                      </a:pPr>
-                      <a:r>
-                        <a:t>Спрощені однорідні відблиски</a:t>
-                      </a:r>
-                    </a:p>
-                  </a:txBody>
-                  <a:tcPr anchor="ctr">
-                    <a:solidFill>
-                      <a:srgbClr val="161E31"/>
-                    </a:solidFill>
-                  </a:tcPr>
-                </a:tc>
-                <a:tc>
-                  <a:txBody>
-                    <a:bodyPr/>
-                    <a:lstStyle/>
-                    <a:p>
-                      <a:pPr>
-                        <a:defRPr sz="1200">
-                          <a:solidFill>
-                            <a:srgbClr val="76B900"/>
-                          </a:solidFill>
-                        </a:defRPr>
-                      </a:pPr>
-                      <a:r>
-                        <a:t>Шовковий блиск тканин, світло на пасмах</a:t>
-                      </a:r>
-                    </a:p>
-                  </a:txBody>
-                  <a:tcPr anchor="ctr">
-                    <a:solidFill>
-                      <a:srgbClr val="161E31"/>
-                    </a:solidFill>
-                  </a:tcPr>
-                </a:tc>
-              </a:tr>
-              <a:tr h="877824">
-                <a:tc>
-                  <a:txBody>
-                    <a:bodyPr/>
-                    <a:lstStyle/>
-                    <a:p>
-                      <a:pPr>
-                        <a:defRPr sz="1200">
-                          <a:solidFill>
-                            <a:srgbClr val="FFFFFF"/>
-                          </a:solidFill>
-                        </a:defRPr>
-                      </a:pPr>
-                      <a:r>
-                        <a:t>4K Ultra RT (RTX 5090)</a:t>
-                      </a:r>
-                    </a:p>
-                  </a:txBody>
-                  <a:tcPr anchor="ctr">
-                    <a:solidFill>
-                      <a:srgbClr val="121928"/>
-                    </a:solidFill>
-                  </a:tcPr>
-                </a:tc>
-                <a:tc>
-                  <a:txBody>
-                    <a:bodyPr/>
-                    <a:lstStyle/>
-                    <a:p>
-                      <a:pPr>
-                        <a:defRPr sz="1200">
-                          <a:solidFill>
-                            <a:srgbClr val="FFFFFF"/>
-                          </a:solidFill>
-                        </a:defRPr>
-                      </a:pPr>
-                      <a:r>
-                        <a:t>128 FPS (базовий)</a:t>
-                      </a:r>
-                    </a:p>
-                  </a:txBody>
-                  <a:tcPr anchor="ctr">
-                    <a:solidFill>
-                      <a:srgbClr val="121928"/>
-                    </a:solidFill>
-                  </a:tcPr>
-                </a:tc>
-                <a:tc>
-                  <a:txBody>
-                    <a:bodyPr/>
-                    <a:lstStyle/>
-                    <a:p>
-                      <a:pPr>
-                        <a:defRPr sz="1200">
-                          <a:solidFill>
-                            <a:srgbClr val="76B900"/>
-                          </a:solidFill>
-                        </a:defRPr>
-                      </a:pPr>
-                      <a:r>
-                        <a:t>105+ FPS (після оптимізації драйвера)</a:t>
-                      </a:r>
-                    </a:p>
-                  </a:txBody>
-                  <a:tcPr anchor="ctr">
-                    <a:solidFill>
-                      <a:srgbClr val="121928"/>
-                    </a:solidFill>
-                  </a:tcPr>
-                </a:tc>
-              </a:tr>
-              <a:tr h="877824">
-                <a:tc>
-                  <a:txBody>
-                    <a:bodyPr/>
-                    <a:lstStyle/>
-                    <a:p>
-                      <a:pPr>
-                        <a:defRPr sz="1200">
-                          <a:solidFill>
-                            <a:srgbClr val="FFFFFF"/>
-                          </a:solidFill>
-                        </a:defRPr>
-                      </a:pPr>
-                      <a:r>
-                        <a:t>1080p Ultra RT</a:t>
-                      </a:r>
-                    </a:p>
-                  </a:txBody>
-                  <a:tcPr anchor="ctr">
-                    <a:solidFill>
-                      <a:srgbClr val="161E31"/>
-                    </a:solidFill>
-                  </a:tcPr>
-                </a:tc>
-                <a:tc>
-                  <a:txBody>
-                    <a:bodyPr/>
-                    <a:lstStyle/>
-                    <a:p>
-                      <a:pPr>
-                        <a:defRPr sz="1200">
-                          <a:solidFill>
-                            <a:srgbClr val="FFFFFF"/>
-                          </a:solidFill>
-                        </a:defRPr>
-                      </a:pPr>
-                      <a:r>
-                        <a:t>180 FPS (упор у CPU)</a:t>
-                      </a:r>
-                    </a:p>
-                  </a:txBody>
-                  <a:tcPr anchor="ctr">
-                    <a:solidFill>
-                      <a:srgbClr val="161E31"/>
-                    </a:solidFill>
-                  </a:tcPr>
-                </a:tc>
-                <a:tc>
-                  <a:txBody>
-                    <a:bodyPr/>
-                    <a:lstStyle/>
-                    <a:p>
-                      <a:pPr>
-                        <a:defRPr sz="1200">
-                          <a:solidFill>
-                            <a:srgbClr val="76B900"/>
-                          </a:solidFill>
-                        </a:defRPr>
-                      </a:pPr>
-                      <a:r>
-                        <a:t>134 FPS (стабільний фреймрейт)</a:t>
-                      </a:r>
-                    </a:p>
-                  </a:txBody>
-                  <a:tcPr anchor="ctr">
-                    <a:solidFill>
-                      <a:srgbClr val="161E31"/>
-                    </a:solidFill>
-                  </a:tcPr>
-                </a:tc>
-              </a:tr>
-            </a:tbl>
-          </a:graphicData>
-        </a:graphic>
-      </p:graphicFrame>
+        </p:nvSpPr>
+        <p:spPr>
+          <a:xfrm>
+            <a:off x="731520" y="2788920"/>
+            <a:ext cx="10698480" cy="1005840"/>
+          </a:xfrm>
+          <a:prstGeom prst="roundRect">
+            <a:avLst/>
+          </a:prstGeom>
+          <a:solidFill>
+            <a:srgbClr val="121826"/>
+          </a:solidFill>
+          <a:ln>
+            <a:solidFill>
+              <a:srgbClr val="222D44"/>
+            </a:solidFill>
+          </a:ln>
+        </p:spPr>
+        <p:style>
+          <a:lnRef idx="1">
+            <a:schemeClr val="accent1"/>
+          </a:lnRef>
+          <a:fillRef idx="3">
+            <a:schemeClr val="accent1"/>
+          </a:fillRef>
+          <a:effectRef idx="2">
+            <a:schemeClr val="accent1"/>
+          </a:effectRef>
+          <a:fontRef idx="minor">
+            <a:schemeClr val="lt1"/>
+          </a:fontRef>
+        </p:style>
+        <p:txBody>
+          <a:bodyPr rtlCol="0" anchor="ctr" wrap="square"/>
+          <a:lstStyle/>
+          <a:p>
+            <a:pPr algn="ctr">
+              <a:defRPr sz="1300" b="1">
+                <a:solidFill>
+                  <a:srgbClr val="76B900"/>
+                </a:solidFill>
+              </a:defRPr>
+            </a:pPr>
+            <a:r>
+              <a:t>📦 Безкоштовність для гравців  ➔  </a:t>
+            </a:r>
+            <a:r>
+              <a:rPr sz="1200" b="0">
+                <a:solidFill>
+                  <a:srgbClr val="FFFFFF"/>
+                </a:solidFill>
+              </a:rPr>
+              <a:t>Технологія активується в налаштуваннях гри без додаткової плати; потрібен лише свіжий драйвер від жовтня 2026.</a:t>
+            </a:r>
+          </a:p>
+        </p:txBody>
+      </p:sp>
+      <p:sp>
+        <p:nvSpPr>
+          <p:cNvPr id="7" name="Rounded Rectangle 6"/>
+          <p:cNvSpPr/>
+          <p:nvPr/>
+        </p:nvSpPr>
+        <p:spPr>
+          <a:xfrm>
+            <a:off x="731520" y="3931920"/>
+            <a:ext cx="10698480" cy="1005840"/>
+          </a:xfrm>
+          <a:prstGeom prst="roundRect">
+            <a:avLst/>
+          </a:prstGeom>
+          <a:solidFill>
+            <a:srgbClr val="121826"/>
+          </a:solidFill>
+          <a:ln>
+            <a:solidFill>
+              <a:srgbClr val="222D44"/>
+            </a:solidFill>
+          </a:ln>
+        </p:spPr>
+        <p:style>
+          <a:lnRef idx="1">
+            <a:schemeClr val="accent1"/>
+          </a:lnRef>
+          <a:fillRef idx="3">
+            <a:schemeClr val="accent1"/>
+          </a:fillRef>
+          <a:effectRef idx="2">
+            <a:schemeClr val="accent1"/>
+          </a:effectRef>
+          <a:fontRef idx="minor">
+            <a:schemeClr val="lt1"/>
+          </a:fontRef>
+        </p:style>
+        <p:txBody>
+          <a:bodyPr rtlCol="0" anchor="ctr" wrap="square"/>
+          <a:lstStyle/>
+          <a:p>
+            <a:pPr algn="ctr">
+              <a:defRPr sz="1300" b="1">
+                <a:solidFill>
+                  <a:srgbClr val="76B900"/>
+                </a:solidFill>
+              </a:defRPr>
+            </a:pPr>
+            <a:r>
+              <a:t>👨‍💻 Відкритий SDK розробника  ➔  </a:t>
+            </a:r>
+            <a:r>
+              <a:rPr sz="1200" b="0">
+                <a:solidFill>
+                  <a:srgbClr val="FFFFFF"/>
+                </a:solidFill>
+              </a:rPr>
+              <a:t>NVIDIA надає відкритий DLSS 5 SDK без роялті та ліцензійних платежів для авторів ігор і веб-сервісів.</a:t>
+            </a:r>
+          </a:p>
+        </p:txBody>
+      </p:sp>
+      <p:sp>
+        <p:nvSpPr>
+          <p:cNvPr id="8" name="Rounded Rectangle 7"/>
+          <p:cNvSpPr/>
+          <p:nvPr/>
+        </p:nvSpPr>
+        <p:spPr>
+          <a:xfrm>
+            <a:off x="731520" y="5074920"/>
+            <a:ext cx="10698480" cy="1005840"/>
+          </a:xfrm>
+          <a:prstGeom prst="roundRect">
+            <a:avLst/>
+          </a:prstGeom>
+          <a:solidFill>
+            <a:srgbClr val="121826"/>
+          </a:solidFill>
+          <a:ln>
+            <a:solidFill>
+              <a:srgbClr val="222D44"/>
+            </a:solidFill>
+          </a:ln>
+        </p:spPr>
+        <p:style>
+          <a:lnRef idx="1">
+            <a:schemeClr val="accent1"/>
+          </a:lnRef>
+          <a:fillRef idx="3">
+            <a:schemeClr val="accent1"/>
+          </a:fillRef>
+          <a:effectRef idx="2">
+            <a:schemeClr val="accent1"/>
+          </a:effectRef>
+          <a:fontRef idx="minor">
+            <a:schemeClr val="lt1"/>
+          </a:fontRef>
+        </p:style>
+        <p:txBody>
+          <a:bodyPr rtlCol="0" anchor="ctr" wrap="square"/>
+          <a:lstStyle/>
+          <a:p>
+            <a:pPr algn="ctr">
+              <a:defRPr sz="1300" b="1">
+                <a:solidFill>
+                  <a:srgbClr val="76B900"/>
+                </a:solidFill>
+              </a:defRPr>
+            </a:pPr>
+            <a:r>
+              <a:t>🎯 Демократизація через Preset C  ➔  </a:t>
+            </a:r>
+            <a:r>
+              <a:rPr sz="1200" b="0">
+                <a:solidFill>
+                  <a:srgbClr val="FFFFFF"/>
+                </a:solidFill>
+              </a:rPr>
+              <a:t>Полегшений режим роботи дозволяє запустити нейронний рендеринг навіть на народних відеокартах класу RTX 5060.</a:t>
+            </a:r>
+          </a:p>
+        </p:txBody>
+      </p:sp>
     </p:spTree>
   </p:cSld>
   <p:clrMapOvr>
